--- a/docs/theme-preview/pptx/magazine.pptx
+++ b/docs/theme-preview/pptx/magazine.pptx
@@ -12237,7 +12237,7 @@
                 <a:ea typeface="Pretendard" pitchFamily="34" charset="-122"/>
                 <a:cs typeface="Pretendard" pitchFamily="34" charset="-120"/>
               </a:rPr>
-              <a:t>Markdown Semantics</a:t>
+              <a:t>Semantic Blocks</a:t>
             </a:r>
             <a:endParaRPr lang="en-US" sz="2200" dirty="0"/>
           </a:p>
@@ -16292,7 +16292,7 @@
                 <a:ea typeface="Pretendard" pitchFamily="34" charset="-122"/>
                 <a:cs typeface="Pretendard" pitchFamily="34" charset="-120"/>
               </a:rPr>
-              <a:t>Markdown Semantics</a:t>
+              <a:t>Semantic Blocks</a:t>
             </a:r>
             <a:endParaRPr lang="en-US" sz="3400" dirty="0"/>
           </a:p>

--- a/docs/theme-preview/pptx/magazine.pptx
+++ b/docs/theme-preview/pptx/magazine.pptx
@@ -125,7 +125,7 @@
 </p:presentation>
 </file>
 
-<file path=ppt/charts/chart12.xml><?xml version="1.0" encoding="utf-8"?>
+<file path=ppt/charts/chart10.xml><?xml version="1.0" encoding="utf-8"?>
 <c:chartSpace xmlns:c="http://schemas.openxmlformats.org/drawingml/2006/chart" xmlns:a="http://schemas.openxmlformats.org/drawingml/2006/main" xmlns:r="http://schemas.openxmlformats.org/officeDocument/2006/relationships">
   <c:date1904 val="0"/>
   <c:roundedCorners val="1"/>
@@ -11146,8 +11146,37 @@
         </p:nvSpPr>
         <p:spPr>
           <a:xfrm>
-            <a:off x="914400" y="1417320"/>
-            <a:ext cx="73152" cy="868680"/>
+            <a:off x="786384" y="1956816"/>
+            <a:ext cx="32004" cy="3483864"/>
+          </a:xfrm>
+          <a:prstGeom prst="rect">
+            <a:avLst/>
+          </a:prstGeom>
+          <a:solidFill>
+            <a:srgbClr val="111827">
+              <a:alpha val="80000"/>
+            </a:srgbClr>
+          </a:solidFill>
+          <a:ln w="12700">
+            <a:solidFill>
+              <a:srgbClr val="111827">
+                <a:alpha val="0"/>
+              </a:srgbClr>
+            </a:solidFill>
+            <a:prstDash val="solid"/>
+          </a:ln>
+        </p:spPr>
+      </p:sp>
+      <p:sp>
+        <p:nvSpPr>
+          <p:cNvPr id="9" name="Shape 7"/>
+          <p:cNvSpPr/>
+          <p:nvPr/>
+        </p:nvSpPr>
+        <p:spPr>
+          <a:xfrm>
+            <a:off x="914400" y="1865376"/>
+            <a:ext cx="73152" cy="1024128"/>
           </a:xfrm>
           <a:prstGeom prst="rect">
             <a:avLst/>
@@ -11167,14 +11196,14 @@
       </p:sp>
       <p:sp>
         <p:nvSpPr>
-          <p:cNvPr id="9" name="Shape 7"/>
-          <p:cNvSpPr/>
-          <p:nvPr/>
-        </p:nvSpPr>
-        <p:spPr>
-          <a:xfrm>
-            <a:off x="914400" y="2560320"/>
-            <a:ext cx="73152" cy="868680"/>
+          <p:cNvPr id="10" name="Shape 8"/>
+          <p:cNvSpPr/>
+          <p:nvPr/>
+        </p:nvSpPr>
+        <p:spPr>
+          <a:xfrm>
+            <a:off x="914400" y="3191256"/>
+            <a:ext cx="73152" cy="1024128"/>
           </a:xfrm>
           <a:prstGeom prst="rect">
             <a:avLst/>
@@ -11194,14 +11223,14 @@
       </p:sp>
       <p:sp>
         <p:nvSpPr>
-          <p:cNvPr id="10" name="Shape 8"/>
-          <p:cNvSpPr/>
-          <p:nvPr/>
-        </p:nvSpPr>
-        <p:spPr>
-          <a:xfrm>
-            <a:off x="914400" y="3703320"/>
-            <a:ext cx="73152" cy="868680"/>
+          <p:cNvPr id="11" name="Shape 9"/>
+          <p:cNvSpPr/>
+          <p:nvPr/>
+        </p:nvSpPr>
+        <p:spPr>
+          <a:xfrm>
+            <a:off x="914400" y="4507992"/>
+            <a:ext cx="73152" cy="1024128"/>
           </a:xfrm>
           <a:prstGeom prst="rect">
             <a:avLst/>
@@ -11221,7 +11250,7 @@
       </p:sp>
       <p:pic>
         <p:nvPicPr>
-          <p:cNvPr id="11" name="Image 0" descr="preencoded.png">    </p:cNvPr>
+          <p:cNvPr id="12" name="Image 0" descr="preencoded.png">    </p:cNvPr>
           <p:cNvPicPr>
             <a:picLocks noChangeAspect="1"/>
           </p:cNvPicPr>
@@ -11241,8 +11270,8 @@
         </p:blipFill>
         <p:spPr>
           <a:xfrm>
-            <a:off x="914400" y="1417320"/>
-            <a:ext cx="10241280" cy="868680"/>
+            <a:off x="914400" y="1865376"/>
+            <a:ext cx="10241280" cy="1024128"/>
           </a:xfrm>
           <a:prstGeom prst="rect">
             <a:avLst/>
@@ -11251,14 +11280,14 @@
       </p:pic>
       <p:sp>
         <p:nvSpPr>
-          <p:cNvPr id="12" name="Shape 9"/>
-          <p:cNvSpPr/>
-          <p:nvPr/>
-        </p:nvSpPr>
-        <p:spPr>
-          <a:xfrm>
-            <a:off x="914400" y="1417320"/>
-            <a:ext cx="10241280" cy="868680"/>
+          <p:cNvPr id="13" name="Shape 10"/>
+          <p:cNvSpPr/>
+          <p:nvPr/>
+        </p:nvSpPr>
+        <p:spPr>
+          <a:xfrm>
+            <a:off x="914400" y="1865376"/>
+            <a:ext cx="10241280" cy="1024128"/>
           </a:xfrm>
           <a:prstGeom prst="rect">
             <a:avLst/>
@@ -11287,7 +11316,7 @@
       </p:sp>
       <p:pic>
         <p:nvPicPr>
-          <p:cNvPr id="13" name="Image 1" descr="preencoded.png">    </p:cNvPr>
+          <p:cNvPr id="14" name="Image 1" descr="preencoded.png">    </p:cNvPr>
           <p:cNvPicPr>
             <a:picLocks noChangeAspect="1"/>
           </p:cNvPicPr>
@@ -11307,8 +11336,8 @@
         </p:blipFill>
         <p:spPr>
           <a:xfrm>
-            <a:off x="914400" y="2560320"/>
-            <a:ext cx="10241280" cy="868680"/>
+            <a:off x="914400" y="3191256"/>
+            <a:ext cx="10241280" cy="1024128"/>
           </a:xfrm>
           <a:prstGeom prst="rect">
             <a:avLst/>
@@ -11317,14 +11346,14 @@
       </p:pic>
       <p:sp>
         <p:nvSpPr>
-          <p:cNvPr id="14" name="Shape 10"/>
-          <p:cNvSpPr/>
-          <p:nvPr/>
-        </p:nvSpPr>
-        <p:spPr>
-          <a:xfrm>
-            <a:off x="914400" y="2560320"/>
-            <a:ext cx="10241280" cy="868680"/>
+          <p:cNvPr id="15" name="Shape 11"/>
+          <p:cNvSpPr/>
+          <p:nvPr/>
+        </p:nvSpPr>
+        <p:spPr>
+          <a:xfrm>
+            <a:off x="914400" y="3191256"/>
+            <a:ext cx="10241280" cy="1024128"/>
           </a:xfrm>
           <a:prstGeom prst="rect">
             <a:avLst/>
@@ -11353,7 +11382,7 @@
       </p:sp>
       <p:pic>
         <p:nvPicPr>
-          <p:cNvPr id="15" name="Image 2" descr="preencoded.png">    </p:cNvPr>
+          <p:cNvPr id="16" name="Image 2" descr="preencoded.png">    </p:cNvPr>
           <p:cNvPicPr>
             <a:picLocks noChangeAspect="1"/>
           </p:cNvPicPr>
@@ -11373,8 +11402,8 @@
         </p:blipFill>
         <p:spPr>
           <a:xfrm>
-            <a:off x="914400" y="3703320"/>
-            <a:ext cx="10241280" cy="868680"/>
+            <a:off x="914400" y="4507992"/>
+            <a:ext cx="10241280" cy="1024128"/>
           </a:xfrm>
           <a:prstGeom prst="rect">
             <a:avLst/>
@@ -11383,14 +11412,14 @@
       </p:pic>
       <p:sp>
         <p:nvSpPr>
-          <p:cNvPr id="16" name="Shape 11"/>
-          <p:cNvSpPr/>
-          <p:nvPr/>
-        </p:nvSpPr>
-        <p:spPr>
-          <a:xfrm>
-            <a:off x="914400" y="3703320"/>
-            <a:ext cx="10241280" cy="868680"/>
+          <p:cNvPr id="17" name="Shape 12"/>
+          <p:cNvSpPr/>
+          <p:nvPr/>
+        </p:nvSpPr>
+        <p:spPr>
+          <a:xfrm>
+            <a:off x="914400" y="4507992"/>
+            <a:ext cx="10241280" cy="1024128"/>
           </a:xfrm>
           <a:prstGeom prst="rect">
             <a:avLst/>
@@ -11419,7 +11448,7 @@
       </p:sp>
       <p:sp>
         <p:nvSpPr>
-          <p:cNvPr id="17" name="Text 12"/>
+          <p:cNvPr id="18" name="Text 13"/>
           <p:cNvSpPr txBox="1"/>
           <p:nvPr/>
         </p:nvSpPr>
@@ -11461,18 +11490,18 @@
       </p:sp>
       <p:sp>
         <p:nvSpPr>
-          <p:cNvPr id="18" name="Shape 13"/>
-          <p:cNvSpPr/>
-          <p:nvPr/>
-        </p:nvSpPr>
-        <p:spPr>
-          <a:xfrm>
-            <a:off x="1097280" y="1623060"/>
-            <a:ext cx="457200" cy="457200"/>
+          <p:cNvPr id="19" name="Shape 14"/>
+          <p:cNvSpPr/>
+          <p:nvPr/>
+        </p:nvSpPr>
+        <p:spPr>
+          <a:xfrm>
+            <a:off x="1097280" y="2140428"/>
+            <a:ext cx="474025" cy="474025"/>
           </a:xfrm>
           <a:prstGeom prst="roundRect">
             <a:avLst>
-              <a:gd name="adj" fmla="val 8000"/>
+              <a:gd name="adj" fmla="val 7716"/>
             </a:avLst>
           </a:prstGeom>
           <a:solidFill>
@@ -11488,7 +11517,7 @@
       </p:sp>
       <p:pic>
         <p:nvPicPr>
-          <p:cNvPr id="19" name="Image 3" descr="flow icon from tabler-icons (MIT)">    </p:cNvPr>
+          <p:cNvPr id="20" name="Image 3" descr="flow icon from tabler-icons (MIT)">    </p:cNvPr>
           <p:cNvPicPr>
             <a:picLocks noChangeAspect="1"/>
           </p:cNvPicPr>
@@ -11508,8 +11537,8 @@
         </p:blipFill>
         <p:spPr>
           <a:xfrm>
-            <a:off x="1170432" y="1696212"/>
-            <a:ext cx="310896" cy="310896"/>
+            <a:off x="1170432" y="2213580"/>
+            <a:ext cx="327721" cy="327721"/>
           </a:xfrm>
           <a:prstGeom prst="rect">
             <a:avLst/>
@@ -11518,14 +11547,14 @@
       </p:pic>
       <p:sp>
         <p:nvSpPr>
-          <p:cNvPr id="20" name="Text 14"/>
+          <p:cNvPr id="21" name="Text 15"/>
           <p:cNvSpPr txBox="1"/>
           <p:nvPr/>
         </p:nvSpPr>
         <p:spPr>
           <a:xfrm>
-            <a:off x="1682496" y="1508760"/>
-            <a:ext cx="9272016" cy="685800"/>
+            <a:off x="1699321" y="1957548"/>
+            <a:ext cx="9255191" cy="839785"/>
           </a:xfrm>
           <a:prstGeom prst="rect">
             <a:avLst/>
@@ -11577,18 +11606,18 @@
       </p:sp>
       <p:sp>
         <p:nvSpPr>
-          <p:cNvPr id="21" name="Shape 15"/>
-          <p:cNvSpPr/>
-          <p:nvPr/>
-        </p:nvSpPr>
-        <p:spPr>
-          <a:xfrm>
-            <a:off x="1097280" y="2766060"/>
-            <a:ext cx="457200" cy="457200"/>
+          <p:cNvPr id="22" name="Shape 16"/>
+          <p:cNvSpPr/>
+          <p:nvPr/>
+        </p:nvSpPr>
+        <p:spPr>
+          <a:xfrm>
+            <a:off x="1097280" y="3466308"/>
+            <a:ext cx="474025" cy="474025"/>
           </a:xfrm>
           <a:prstGeom prst="roundRect">
             <a:avLst>
-              <a:gd name="adj" fmla="val 8000"/>
+              <a:gd name="adj" fmla="val 7716"/>
             </a:avLst>
           </a:prstGeom>
           <a:solidFill>
@@ -11604,7 +11633,7 @@
       </p:sp>
       <p:pic>
         <p:nvPicPr>
-          <p:cNvPr id="22" name="Image 4" descr="verified icon from tabler-icons (MIT)">    </p:cNvPr>
+          <p:cNvPr id="23" name="Image 4" descr="verified icon from tabler-icons (MIT)">    </p:cNvPr>
           <p:cNvPicPr>
             <a:picLocks noChangeAspect="1"/>
           </p:cNvPicPr>
@@ -11624,8 +11653,8 @@
         </p:blipFill>
         <p:spPr>
           <a:xfrm>
-            <a:off x="1170432" y="2839212"/>
-            <a:ext cx="310896" cy="310896"/>
+            <a:off x="1170432" y="3539460"/>
+            <a:ext cx="327721" cy="327721"/>
           </a:xfrm>
           <a:prstGeom prst="rect">
             <a:avLst/>
@@ -11634,14 +11663,14 @@
       </p:pic>
       <p:sp>
         <p:nvSpPr>
-          <p:cNvPr id="23" name="Text 16"/>
+          <p:cNvPr id="24" name="Text 17"/>
           <p:cNvSpPr txBox="1"/>
           <p:nvPr/>
         </p:nvSpPr>
         <p:spPr>
           <a:xfrm>
-            <a:off x="1682496" y="2651760"/>
-            <a:ext cx="9272016" cy="685800"/>
+            <a:off x="1699321" y="3283428"/>
+            <a:ext cx="9255191" cy="839785"/>
           </a:xfrm>
           <a:prstGeom prst="rect">
             <a:avLst/>
@@ -11693,18 +11722,18 @@
       </p:sp>
       <p:sp>
         <p:nvSpPr>
-          <p:cNvPr id="24" name="Shape 17"/>
-          <p:cNvSpPr/>
-          <p:nvPr/>
-        </p:nvSpPr>
-        <p:spPr>
-          <a:xfrm>
-            <a:off x="1097280" y="3909060"/>
-            <a:ext cx="457200" cy="457200"/>
+          <p:cNvPr id="25" name="Shape 18"/>
+          <p:cNvSpPr/>
+          <p:nvPr/>
+        </p:nvSpPr>
+        <p:spPr>
+          <a:xfrm>
+            <a:off x="1097280" y="4783044"/>
+            <a:ext cx="474025" cy="474025"/>
           </a:xfrm>
           <a:prstGeom prst="roundRect">
             <a:avLst>
-              <a:gd name="adj" fmla="val 8000"/>
+              <a:gd name="adj" fmla="val 7716"/>
             </a:avLst>
           </a:prstGeom>
           <a:solidFill>
@@ -11720,7 +11749,7 @@
       </p:sp>
       <p:pic>
         <p:nvPicPr>
-          <p:cNvPr id="25" name="Image 5" descr="spark icon from tabler-icons (MIT)">    </p:cNvPr>
+          <p:cNvPr id="26" name="Image 5" descr="spark icon from tabler-icons (MIT)">    </p:cNvPr>
           <p:cNvPicPr>
             <a:picLocks noChangeAspect="1"/>
           </p:cNvPicPr>
@@ -11740,8 +11769,8 @@
         </p:blipFill>
         <p:spPr>
           <a:xfrm>
-            <a:off x="1170432" y="3982212"/>
-            <a:ext cx="310896" cy="310896"/>
+            <a:off x="1170432" y="4856196"/>
+            <a:ext cx="327721" cy="327721"/>
           </a:xfrm>
           <a:prstGeom prst="rect">
             <a:avLst/>
@@ -11750,14 +11779,14 @@
       </p:pic>
       <p:sp>
         <p:nvSpPr>
-          <p:cNvPr id="26" name="Text 18"/>
+          <p:cNvPr id="27" name="Text 19"/>
           <p:cNvSpPr txBox="1"/>
           <p:nvPr/>
         </p:nvSpPr>
         <p:spPr>
           <a:xfrm>
-            <a:off x="1682496" y="3794760"/>
-            <a:ext cx="9272016" cy="685800"/>
+            <a:off x="1699321" y="4600164"/>
+            <a:ext cx="9255191" cy="839785"/>
           </a:xfrm>
           <a:prstGeom prst="rect">
             <a:avLst/>
@@ -12014,8 +12043,8 @@
         </p:nvSpPr>
         <p:spPr>
           <a:xfrm>
-            <a:off x="914400" y="1463040"/>
-            <a:ext cx="10241280" cy="73152"/>
+            <a:off x="822960" y="1188720"/>
+            <a:ext cx="10515600" cy="45720"/>
           </a:xfrm>
           <a:prstGeom prst="rect">
             <a:avLst/>
@@ -12035,7 +12064,387 @@
       </p:sp>
       <p:sp>
         <p:nvSpPr>
-          <p:cNvPr id="9" name="Text 7"/>
+          <p:cNvPr id="9" name="Shape 7"/>
+          <p:cNvSpPr/>
+          <p:nvPr/>
+        </p:nvSpPr>
+        <p:spPr>
+          <a:xfrm>
+            <a:off x="822960" y="6199632"/>
+            <a:ext cx="2011680" cy="45720"/>
+          </a:xfrm>
+          <a:prstGeom prst="rect">
+            <a:avLst/>
+          </a:prstGeom>
+          <a:solidFill>
+            <a:srgbClr val="111827"/>
+          </a:solidFill>
+          <a:ln w="12700">
+            <a:solidFill>
+              <a:srgbClr val="111827">
+                <a:alpha val="0"/>
+              </a:srgbClr>
+            </a:solidFill>
+            <a:prstDash val="solid"/>
+          </a:ln>
+        </p:spPr>
+      </p:sp>
+      <p:sp>
+        <p:nvSpPr>
+          <p:cNvPr id="10" name="Shape 8"/>
+          <p:cNvSpPr/>
+          <p:nvPr/>
+        </p:nvSpPr>
+        <p:spPr>
+          <a:xfrm>
+            <a:off x="6080760" y="1389888"/>
+            <a:ext cx="22860" cy="4663440"/>
+          </a:xfrm>
+          <a:prstGeom prst="rect">
+            <a:avLst/>
+          </a:prstGeom>
+          <a:solidFill>
+            <a:srgbClr val="D6D3D1">
+              <a:alpha val="90000"/>
+            </a:srgbClr>
+          </a:solidFill>
+          <a:ln w="12700">
+            <a:solidFill>
+              <a:srgbClr val="D6D3D1">
+                <a:alpha val="0"/>
+              </a:srgbClr>
+            </a:solidFill>
+            <a:prstDash val="solid"/>
+          </a:ln>
+        </p:spPr>
+      </p:sp>
+      <p:sp>
+        <p:nvSpPr>
+          <p:cNvPr id="11" name="Shape 9"/>
+          <p:cNvSpPr/>
+          <p:nvPr/>
+        </p:nvSpPr>
+        <p:spPr>
+          <a:xfrm>
+            <a:off x="822960" y="1389888"/>
+            <a:ext cx="73152" cy="658368"/>
+          </a:xfrm>
+          <a:prstGeom prst="rect">
+            <a:avLst/>
+          </a:prstGeom>
+          <a:solidFill>
+            <a:srgbClr val="C2410C"/>
+          </a:solidFill>
+          <a:ln w="12700">
+            <a:solidFill>
+              <a:srgbClr val="C2410C">
+                <a:alpha val="0"/>
+              </a:srgbClr>
+            </a:solidFill>
+            <a:prstDash val="solid"/>
+          </a:ln>
+        </p:spPr>
+      </p:sp>
+      <p:sp>
+        <p:nvSpPr>
+          <p:cNvPr id="12" name="Shape 10"/>
+          <p:cNvSpPr/>
+          <p:nvPr/>
+        </p:nvSpPr>
+        <p:spPr>
+          <a:xfrm>
+            <a:off x="822960" y="2194560"/>
+            <a:ext cx="73152" cy="658368"/>
+          </a:xfrm>
+          <a:prstGeom prst="rect">
+            <a:avLst/>
+          </a:prstGeom>
+          <a:solidFill>
+            <a:srgbClr val="111827"/>
+          </a:solidFill>
+          <a:ln w="12700">
+            <a:solidFill>
+              <a:srgbClr val="111827">
+                <a:alpha val="0"/>
+              </a:srgbClr>
+            </a:solidFill>
+            <a:prstDash val="solid"/>
+          </a:ln>
+        </p:spPr>
+      </p:sp>
+      <p:sp>
+        <p:nvSpPr>
+          <p:cNvPr id="13" name="Shape 11"/>
+          <p:cNvSpPr/>
+          <p:nvPr/>
+        </p:nvSpPr>
+        <p:spPr>
+          <a:xfrm>
+            <a:off x="822960" y="2990088"/>
+            <a:ext cx="73152" cy="658368"/>
+          </a:xfrm>
+          <a:prstGeom prst="rect">
+            <a:avLst/>
+          </a:prstGeom>
+          <a:solidFill>
+            <a:srgbClr val="C2410C"/>
+          </a:solidFill>
+          <a:ln w="12700">
+            <a:solidFill>
+              <a:srgbClr val="C2410C">
+                <a:alpha val="0"/>
+              </a:srgbClr>
+            </a:solidFill>
+            <a:prstDash val="solid"/>
+          </a:ln>
+        </p:spPr>
+      </p:sp>
+      <p:sp>
+        <p:nvSpPr>
+          <p:cNvPr id="14" name="Shape 12"/>
+          <p:cNvSpPr/>
+          <p:nvPr/>
+        </p:nvSpPr>
+        <p:spPr>
+          <a:xfrm>
+            <a:off x="822960" y="3794760"/>
+            <a:ext cx="73152" cy="658368"/>
+          </a:xfrm>
+          <a:prstGeom prst="rect">
+            <a:avLst/>
+          </a:prstGeom>
+          <a:solidFill>
+            <a:srgbClr val="111827"/>
+          </a:solidFill>
+          <a:ln w="12700">
+            <a:solidFill>
+              <a:srgbClr val="111827">
+                <a:alpha val="0"/>
+              </a:srgbClr>
+            </a:solidFill>
+            <a:prstDash val="solid"/>
+          </a:ln>
+        </p:spPr>
+      </p:sp>
+      <p:sp>
+        <p:nvSpPr>
+          <p:cNvPr id="15" name="Shape 13"/>
+          <p:cNvSpPr/>
+          <p:nvPr/>
+        </p:nvSpPr>
+        <p:spPr>
+          <a:xfrm>
+            <a:off x="822960" y="4599432"/>
+            <a:ext cx="73152" cy="658368"/>
+          </a:xfrm>
+          <a:prstGeom prst="rect">
+            <a:avLst/>
+          </a:prstGeom>
+          <a:solidFill>
+            <a:srgbClr val="C2410C"/>
+          </a:solidFill>
+          <a:ln w="12700">
+            <a:solidFill>
+              <a:srgbClr val="C2410C">
+                <a:alpha val="0"/>
+              </a:srgbClr>
+            </a:solidFill>
+            <a:prstDash val="solid"/>
+          </a:ln>
+        </p:spPr>
+      </p:sp>
+      <p:sp>
+        <p:nvSpPr>
+          <p:cNvPr id="16" name="Shape 14"/>
+          <p:cNvSpPr/>
+          <p:nvPr/>
+        </p:nvSpPr>
+        <p:spPr>
+          <a:xfrm>
+            <a:off x="822960" y="5394960"/>
+            <a:ext cx="73152" cy="658368"/>
+          </a:xfrm>
+          <a:prstGeom prst="rect">
+            <a:avLst/>
+          </a:prstGeom>
+          <a:solidFill>
+            <a:srgbClr val="111827"/>
+          </a:solidFill>
+          <a:ln w="12700">
+            <a:solidFill>
+              <a:srgbClr val="111827">
+                <a:alpha val="0"/>
+              </a:srgbClr>
+            </a:solidFill>
+            <a:prstDash val="solid"/>
+          </a:ln>
+        </p:spPr>
+      </p:sp>
+      <p:sp>
+        <p:nvSpPr>
+          <p:cNvPr id="17" name="Shape 15"/>
+          <p:cNvSpPr/>
+          <p:nvPr/>
+        </p:nvSpPr>
+        <p:spPr>
+          <a:xfrm>
+            <a:off x="6272784" y="1389888"/>
+            <a:ext cx="73152" cy="658368"/>
+          </a:xfrm>
+          <a:prstGeom prst="rect">
+            <a:avLst/>
+          </a:prstGeom>
+          <a:solidFill>
+            <a:srgbClr val="C2410C"/>
+          </a:solidFill>
+          <a:ln w="12700">
+            <a:solidFill>
+              <a:srgbClr val="C2410C">
+                <a:alpha val="0"/>
+              </a:srgbClr>
+            </a:solidFill>
+            <a:prstDash val="solid"/>
+          </a:ln>
+        </p:spPr>
+      </p:sp>
+      <p:sp>
+        <p:nvSpPr>
+          <p:cNvPr id="18" name="Shape 16"/>
+          <p:cNvSpPr/>
+          <p:nvPr/>
+        </p:nvSpPr>
+        <p:spPr>
+          <a:xfrm>
+            <a:off x="6272784" y="2194560"/>
+            <a:ext cx="73152" cy="658368"/>
+          </a:xfrm>
+          <a:prstGeom prst="rect">
+            <a:avLst/>
+          </a:prstGeom>
+          <a:solidFill>
+            <a:srgbClr val="111827"/>
+          </a:solidFill>
+          <a:ln w="12700">
+            <a:solidFill>
+              <a:srgbClr val="111827">
+                <a:alpha val="0"/>
+              </a:srgbClr>
+            </a:solidFill>
+            <a:prstDash val="solid"/>
+          </a:ln>
+        </p:spPr>
+      </p:sp>
+      <p:sp>
+        <p:nvSpPr>
+          <p:cNvPr id="19" name="Shape 17"/>
+          <p:cNvSpPr/>
+          <p:nvPr/>
+        </p:nvSpPr>
+        <p:spPr>
+          <a:xfrm>
+            <a:off x="6272784" y="2990088"/>
+            <a:ext cx="73152" cy="658368"/>
+          </a:xfrm>
+          <a:prstGeom prst="rect">
+            <a:avLst/>
+          </a:prstGeom>
+          <a:solidFill>
+            <a:srgbClr val="C2410C"/>
+          </a:solidFill>
+          <a:ln w="12700">
+            <a:solidFill>
+              <a:srgbClr val="C2410C">
+                <a:alpha val="0"/>
+              </a:srgbClr>
+            </a:solidFill>
+            <a:prstDash val="solid"/>
+          </a:ln>
+        </p:spPr>
+      </p:sp>
+      <p:sp>
+        <p:nvSpPr>
+          <p:cNvPr id="20" name="Shape 18"/>
+          <p:cNvSpPr/>
+          <p:nvPr/>
+        </p:nvSpPr>
+        <p:spPr>
+          <a:xfrm>
+            <a:off x="6272784" y="3794760"/>
+            <a:ext cx="73152" cy="658368"/>
+          </a:xfrm>
+          <a:prstGeom prst="rect">
+            <a:avLst/>
+          </a:prstGeom>
+          <a:solidFill>
+            <a:srgbClr val="111827"/>
+          </a:solidFill>
+          <a:ln w="12700">
+            <a:solidFill>
+              <a:srgbClr val="111827">
+                <a:alpha val="0"/>
+              </a:srgbClr>
+            </a:solidFill>
+            <a:prstDash val="solid"/>
+          </a:ln>
+        </p:spPr>
+      </p:sp>
+      <p:sp>
+        <p:nvSpPr>
+          <p:cNvPr id="21" name="Shape 19"/>
+          <p:cNvSpPr/>
+          <p:nvPr/>
+        </p:nvSpPr>
+        <p:spPr>
+          <a:xfrm>
+            <a:off x="6272784" y="4599432"/>
+            <a:ext cx="73152" cy="658368"/>
+          </a:xfrm>
+          <a:prstGeom prst="rect">
+            <a:avLst/>
+          </a:prstGeom>
+          <a:solidFill>
+            <a:srgbClr val="C2410C"/>
+          </a:solidFill>
+          <a:ln w="12700">
+            <a:solidFill>
+              <a:srgbClr val="C2410C">
+                <a:alpha val="0"/>
+              </a:srgbClr>
+            </a:solidFill>
+            <a:prstDash val="solid"/>
+          </a:ln>
+        </p:spPr>
+      </p:sp>
+      <p:sp>
+        <p:nvSpPr>
+          <p:cNvPr id="22" name="Shape 20"/>
+          <p:cNvSpPr/>
+          <p:nvPr/>
+        </p:nvSpPr>
+        <p:spPr>
+          <a:xfrm>
+            <a:off x="6272784" y="5394960"/>
+            <a:ext cx="73152" cy="658368"/>
+          </a:xfrm>
+          <a:prstGeom prst="rect">
+            <a:avLst/>
+          </a:prstGeom>
+          <a:solidFill>
+            <a:srgbClr val="111827"/>
+          </a:solidFill>
+          <a:ln w="12700">
+            <a:solidFill>
+              <a:srgbClr val="111827">
+                <a:alpha val="0"/>
+              </a:srgbClr>
+            </a:solidFill>
+            <a:prstDash val="solid"/>
+          </a:ln>
+        </p:spPr>
+      </p:sp>
+      <p:sp>
+        <p:nvSpPr>
+          <p:cNvPr id="23" name="Text 21"/>
           <p:cNvSpPr txBox="1"/>
           <p:nvPr/>
         </p:nvSpPr>
@@ -12077,14 +12486,14 @@
       </p:sp>
       <p:sp>
         <p:nvSpPr>
-          <p:cNvPr id="10" name="Text 8"/>
+          <p:cNvPr id="24" name="Text 22"/>
           <p:cNvSpPr txBox="1"/>
           <p:nvPr/>
         </p:nvSpPr>
         <p:spPr>
           <a:xfrm>
-            <a:off x="987552" y="1572768"/>
-            <a:ext cx="10094976" cy="355092"/>
+            <a:off x="1042416" y="1481328"/>
+            <a:ext cx="4645152" cy="475488"/>
           </a:xfrm>
           <a:prstGeom prst="rect">
             <a:avLst/>
@@ -12096,14 +12505,14 @@
           <a:bodyPr wrap="square" lIns="0" tIns="25400" rIns="25400" bIns="0" rtlCol="0" anchor="ctr"/>
           <a:lstStyle/>
           <a:p>
-            <a:pPr algn="l" indent="0" marL="0">
+            <a:pPr algn="ctr" indent="0" marL="0">
               <a:lnSpc>
                 <a:spcPct val="120000"/>
               </a:lnSpc>
               <a:buNone/>
             </a:pPr>
             <a:r>
-              <a:rPr lang="en-US" sz="2200" dirty="0">
+              <a:rPr lang="en-US" sz="1800" dirty="0">
                 <a:solidFill>
                   <a:srgbClr val="18181B"/>
                 </a:solidFill>
@@ -12111,22 +12520,22 @@
                 <a:ea typeface="Pretendard" pitchFamily="34" charset="-122"/>
                 <a:cs typeface="Pretendard" pitchFamily="34" charset="-120"/>
               </a:rPr>
-              <a:t>Preview Purpose</a:t>
+              <a:t>01  Preview Purpose</a:t>
             </a:r>
-            <a:endParaRPr lang="en-US" sz="2200" dirty="0"/>
+            <a:endParaRPr lang="en-US" sz="1800" dirty="0"/>
           </a:p>
         </p:txBody>
       </p:sp>
       <p:sp>
         <p:nvSpPr>
-          <p:cNvPr id="11" name="Text 9"/>
+          <p:cNvPr id="25" name="Text 23"/>
           <p:cNvSpPr txBox="1"/>
           <p:nvPr/>
         </p:nvSpPr>
         <p:spPr>
           <a:xfrm>
-            <a:off x="987552" y="1927860"/>
-            <a:ext cx="10094976" cy="355092"/>
+            <a:off x="1042416" y="2286000"/>
+            <a:ext cx="4645152" cy="475488"/>
           </a:xfrm>
           <a:prstGeom prst="rect">
             <a:avLst/>
@@ -12138,14 +12547,14 @@
           <a:bodyPr wrap="square" lIns="0" tIns="25400" rIns="25400" bIns="0" rtlCol="0" anchor="ctr"/>
           <a:lstStyle/>
           <a:p>
-            <a:pPr algn="l" indent="0" marL="0">
+            <a:pPr algn="ctr" indent="0" marL="0">
               <a:lnSpc>
                 <a:spcPct val="120000"/>
               </a:lnSpc>
               <a:buNone/>
             </a:pPr>
             <a:r>
-              <a:rPr lang="en-US" sz="2200" dirty="0">
+              <a:rPr lang="en-US" sz="1800" dirty="0">
                 <a:solidFill>
                   <a:srgbClr val="18181B"/>
                 </a:solidFill>
@@ -12153,22 +12562,22 @@
                 <a:ea typeface="Pretendard" pitchFamily="34" charset="-122"/>
                 <a:cs typeface="Pretendard" pitchFamily="34" charset="-120"/>
               </a:rPr>
-              <a:t>Composition Contract</a:t>
+              <a:t>02  Composition Contract</a:t>
             </a:r>
-            <a:endParaRPr lang="en-US" sz="2200" dirty="0"/>
+            <a:endParaRPr lang="en-US" sz="1800" dirty="0"/>
           </a:p>
         </p:txBody>
       </p:sp>
       <p:sp>
         <p:nvSpPr>
-          <p:cNvPr id="12" name="Text 10"/>
+          <p:cNvPr id="26" name="Text 24"/>
           <p:cNvSpPr txBox="1"/>
           <p:nvPr/>
         </p:nvSpPr>
         <p:spPr>
           <a:xfrm>
-            <a:off x="987552" y="2282952"/>
-            <a:ext cx="10094976" cy="355092"/>
+            <a:off x="1042416" y="3081528"/>
+            <a:ext cx="4645152" cy="475488"/>
           </a:xfrm>
           <a:prstGeom prst="rect">
             <a:avLst/>
@@ -12180,14 +12589,14 @@
           <a:bodyPr wrap="square" lIns="0" tIns="25400" rIns="25400" bIns="0" rtlCol="0" anchor="ctr"/>
           <a:lstStyle/>
           <a:p>
-            <a:pPr algn="l" indent="0" marL="0">
+            <a:pPr algn="ctr" indent="0" marL="0">
               <a:lnSpc>
                 <a:spcPct val="120000"/>
               </a:lnSpc>
               <a:buNone/>
             </a:pPr>
             <a:r>
-              <a:rPr lang="en-US" sz="2200" dirty="0">
+              <a:rPr lang="en-US" sz="1800" dirty="0">
                 <a:solidFill>
                   <a:srgbClr val="18181B"/>
                 </a:solidFill>
@@ -12195,22 +12604,22 @@
                 <a:ea typeface="Pretendard" pitchFamily="34" charset="-122"/>
                 <a:cs typeface="Pretendard" pitchFamily="34" charset="-120"/>
               </a:rPr>
-              <a:t>Style Families</a:t>
+              <a:t>03  Style Families</a:t>
             </a:r>
-            <a:endParaRPr lang="en-US" sz="2200" dirty="0"/>
+            <a:endParaRPr lang="en-US" sz="1800" dirty="0"/>
           </a:p>
         </p:txBody>
       </p:sp>
       <p:sp>
         <p:nvSpPr>
-          <p:cNvPr id="13" name="Text 11"/>
+          <p:cNvPr id="27" name="Text 25"/>
           <p:cNvSpPr txBox="1"/>
           <p:nvPr/>
         </p:nvSpPr>
         <p:spPr>
           <a:xfrm>
-            <a:off x="987552" y="2638044"/>
-            <a:ext cx="10094976" cy="355092"/>
+            <a:off x="1042416" y="3886200"/>
+            <a:ext cx="4645152" cy="475488"/>
           </a:xfrm>
           <a:prstGeom prst="rect">
             <a:avLst/>
@@ -12222,14 +12631,14 @@
           <a:bodyPr wrap="square" lIns="0" tIns="25400" rIns="25400" bIns="0" rtlCol="0" anchor="ctr"/>
           <a:lstStyle/>
           <a:p>
-            <a:pPr algn="l" indent="0" marL="0">
+            <a:pPr algn="ctr" indent="0" marL="0">
               <a:lnSpc>
                 <a:spcPct val="120000"/>
               </a:lnSpc>
               <a:buNone/>
             </a:pPr>
             <a:r>
-              <a:rPr lang="en-US" sz="2200" dirty="0">
+              <a:rPr lang="en-US" sz="1800" dirty="0">
                 <a:solidFill>
                   <a:srgbClr val="18181B"/>
                 </a:solidFill>
@@ -12237,22 +12646,22 @@
                 <a:ea typeface="Pretendard" pitchFamily="34" charset="-122"/>
                 <a:cs typeface="Pretendard" pitchFamily="34" charset="-120"/>
               </a:rPr>
-              <a:t>Semantic Blocks</a:t>
+              <a:t>04  Semantic Blocks</a:t>
             </a:r>
-            <a:endParaRPr lang="en-US" sz="2200" dirty="0"/>
+            <a:endParaRPr lang="en-US" sz="1800" dirty="0"/>
           </a:p>
         </p:txBody>
       </p:sp>
       <p:sp>
         <p:nvSpPr>
-          <p:cNvPr id="14" name="Text 12"/>
+          <p:cNvPr id="28" name="Text 26"/>
           <p:cNvSpPr txBox="1"/>
           <p:nvPr/>
         </p:nvSpPr>
         <p:spPr>
           <a:xfrm>
-            <a:off x="987552" y="2993136"/>
-            <a:ext cx="10094976" cy="355092"/>
+            <a:off x="1042416" y="4690872"/>
+            <a:ext cx="4645152" cy="475488"/>
           </a:xfrm>
           <a:prstGeom prst="rect">
             <a:avLst/>
@@ -12264,14 +12673,14 @@
           <a:bodyPr wrap="square" lIns="0" tIns="25400" rIns="25400" bIns="0" rtlCol="0" anchor="ctr"/>
           <a:lstStyle/>
           <a:p>
-            <a:pPr algn="l" indent="0" marL="0">
+            <a:pPr algn="ctr" indent="0" marL="0">
               <a:lnSpc>
                 <a:spcPct val="120000"/>
               </a:lnSpc>
               <a:buNone/>
             </a:pPr>
             <a:r>
-              <a:rPr lang="en-US" sz="2200" dirty="0">
+              <a:rPr lang="en-US" sz="1800" dirty="0">
                 <a:solidFill>
                   <a:srgbClr val="18181B"/>
                 </a:solidFill>
@@ -12279,22 +12688,22 @@
                 <a:ea typeface="Pretendard" pitchFamily="34" charset="-122"/>
                 <a:cs typeface="Pretendard" pitchFamily="34" charset="-120"/>
               </a:rPr>
-              <a:t>Pipeline Diagram</a:t>
+              <a:t>05  Pipeline Diagram</a:t>
             </a:r>
-            <a:endParaRPr lang="en-US" sz="2200" dirty="0"/>
+            <a:endParaRPr lang="en-US" sz="1800" dirty="0"/>
           </a:p>
         </p:txBody>
       </p:sp>
       <p:sp>
         <p:nvSpPr>
-          <p:cNvPr id="15" name="Text 13"/>
+          <p:cNvPr id="29" name="Text 27"/>
           <p:cNvSpPr txBox="1"/>
           <p:nvPr/>
         </p:nvSpPr>
         <p:spPr>
           <a:xfrm>
-            <a:off x="987552" y="3348228"/>
-            <a:ext cx="10094976" cy="355092"/>
+            <a:off x="1042416" y="5486400"/>
+            <a:ext cx="4645152" cy="475488"/>
           </a:xfrm>
           <a:prstGeom prst="rect">
             <a:avLst/>
@@ -12306,14 +12715,14 @@
           <a:bodyPr wrap="square" lIns="0" tIns="25400" rIns="25400" bIns="0" rtlCol="0" anchor="ctr"/>
           <a:lstStyle/>
           <a:p>
-            <a:pPr algn="l" indent="0" marL="0">
+            <a:pPr algn="ctr" indent="0" marL="0">
               <a:lnSpc>
                 <a:spcPct val="120000"/>
               </a:lnSpc>
               <a:buNone/>
             </a:pPr>
             <a:r>
-              <a:rPr lang="en-US" sz="2200" dirty="0">
+              <a:rPr lang="en-US" sz="1800" dirty="0">
                 <a:solidFill>
                   <a:srgbClr val="18181B"/>
                 </a:solidFill>
@@ -12321,22 +12730,22 @@
                 <a:ea typeface="Pretendard" pitchFamily="34" charset="-122"/>
                 <a:cs typeface="Pretendard" pitchFamily="34" charset="-120"/>
               </a:rPr>
-              <a:t>Table Coherence</a:t>
+              <a:t>06  Table Coherence</a:t>
             </a:r>
-            <a:endParaRPr lang="en-US" sz="2200" dirty="0"/>
+            <a:endParaRPr lang="en-US" sz="1800" dirty="0"/>
           </a:p>
         </p:txBody>
       </p:sp>
       <p:sp>
         <p:nvSpPr>
-          <p:cNvPr id="16" name="Text 14"/>
+          <p:cNvPr id="30" name="Text 28"/>
           <p:cNvSpPr txBox="1"/>
           <p:nvPr/>
         </p:nvSpPr>
         <p:spPr>
           <a:xfrm>
-            <a:off x="987552" y="3703320"/>
-            <a:ext cx="10094976" cy="355092"/>
+            <a:off x="6492240" y="1481328"/>
+            <a:ext cx="4645152" cy="475488"/>
           </a:xfrm>
           <a:prstGeom prst="rect">
             <a:avLst/>
@@ -12348,14 +12757,14 @@
           <a:bodyPr wrap="square" lIns="0" tIns="25400" rIns="25400" bIns="0" rtlCol="0" anchor="ctr"/>
           <a:lstStyle/>
           <a:p>
-            <a:pPr algn="l" indent="0" marL="0">
+            <a:pPr algn="ctr" indent="0" marL="0">
               <a:lnSpc>
                 <a:spcPct val="120000"/>
               </a:lnSpc>
               <a:buNone/>
             </a:pPr>
             <a:r>
-              <a:rPr lang="en-US" sz="2200" dirty="0">
+              <a:rPr lang="en-US" sz="1800" dirty="0">
                 <a:solidFill>
                   <a:srgbClr val="18181B"/>
                 </a:solidFill>
@@ -12363,22 +12772,22 @@
                 <a:ea typeface="Pretendard" pitchFamily="34" charset="-122"/>
                 <a:cs typeface="Pretendard" pitchFamily="34" charset="-120"/>
               </a:rPr>
-              <a:t>Chart and Table Pair</a:t>
+              <a:t>07  Chart and Table Pair</a:t>
             </a:r>
-            <a:endParaRPr lang="en-US" sz="2200" dirty="0"/>
+            <a:endParaRPr lang="en-US" sz="1800" dirty="0"/>
           </a:p>
         </p:txBody>
       </p:sp>
       <p:sp>
         <p:nvSpPr>
-          <p:cNvPr id="17" name="Text 15"/>
+          <p:cNvPr id="31" name="Text 29"/>
           <p:cNvSpPr txBox="1"/>
           <p:nvPr/>
         </p:nvSpPr>
         <p:spPr>
           <a:xfrm>
-            <a:off x="987552" y="4058412"/>
-            <a:ext cx="10094976" cy="355092"/>
+            <a:off x="6492240" y="2286000"/>
+            <a:ext cx="4645152" cy="475488"/>
           </a:xfrm>
           <a:prstGeom prst="rect">
             <a:avLst/>
@@ -12390,14 +12799,14 @@
           <a:bodyPr wrap="square" lIns="0" tIns="25400" rIns="25400" bIns="0" rtlCol="0" anchor="ctr"/>
           <a:lstStyle/>
           <a:p>
-            <a:pPr algn="l" indent="0" marL="0">
+            <a:pPr algn="ctr" indent="0" marL="0">
               <a:lnSpc>
                 <a:spcPct val="120000"/>
               </a:lnSpc>
               <a:buNone/>
             </a:pPr>
             <a:r>
-              <a:rPr lang="en-US" sz="2200" dirty="0">
+              <a:rPr lang="en-US" sz="1800" dirty="0">
                 <a:solidFill>
                   <a:srgbClr val="18181B"/>
                 </a:solidFill>
@@ -12405,22 +12814,22 @@
                 <a:ea typeface="Pretendard" pitchFamily="34" charset="-122"/>
                 <a:cs typeface="Pretendard" pitchFamily="34" charset="-120"/>
               </a:rPr>
-              <a:t>Editable Proof Objects</a:t>
+              <a:t>08  Editable Proof Objects</a:t>
             </a:r>
-            <a:endParaRPr lang="en-US" sz="2200" dirty="0"/>
+            <a:endParaRPr lang="en-US" sz="1800" dirty="0"/>
           </a:p>
         </p:txBody>
       </p:sp>
       <p:sp>
         <p:nvSpPr>
-          <p:cNvPr id="18" name="Text 16"/>
+          <p:cNvPr id="32" name="Text 30"/>
           <p:cNvSpPr txBox="1"/>
           <p:nvPr/>
         </p:nvSpPr>
         <p:spPr>
           <a:xfrm>
-            <a:off x="987552" y="4413504"/>
-            <a:ext cx="10094976" cy="355092"/>
+            <a:off x="6492240" y="3081528"/>
+            <a:ext cx="4645152" cy="475488"/>
           </a:xfrm>
           <a:prstGeom prst="rect">
             <a:avLst/>
@@ -12432,14 +12841,14 @@
           <a:bodyPr wrap="square" lIns="0" tIns="25400" rIns="25400" bIns="0" rtlCol="0" anchor="ctr"/>
           <a:lstStyle/>
           <a:p>
-            <a:pPr algn="l" indent="0" marL="0">
+            <a:pPr algn="ctr" indent="0" marL="0">
               <a:lnSpc>
                 <a:spcPct val="120000"/>
               </a:lnSpc>
               <a:buNone/>
             </a:pPr>
             <a:r>
-              <a:rPr lang="en-US" sz="2200" dirty="0">
+              <a:rPr lang="en-US" sz="1800" dirty="0">
                 <a:solidFill>
                   <a:srgbClr val="18181B"/>
                 </a:solidFill>
@@ -12447,22 +12856,22 @@
                 <a:ea typeface="Pretendard" pitchFamily="34" charset="-122"/>
                 <a:cs typeface="Pretendard" pitchFamily="34" charset="-120"/>
               </a:rPr>
-              <a:t>Object Shape Grammar</a:t>
+              <a:t>09  Object Shape Grammar</a:t>
             </a:r>
-            <a:endParaRPr lang="en-US" sz="2200" dirty="0"/>
+            <a:endParaRPr lang="en-US" sz="1800" dirty="0"/>
           </a:p>
         </p:txBody>
       </p:sp>
       <p:sp>
         <p:nvSpPr>
-          <p:cNvPr id="19" name="Text 17"/>
+          <p:cNvPr id="33" name="Text 31"/>
           <p:cNvSpPr txBox="1"/>
           <p:nvPr/>
         </p:nvSpPr>
         <p:spPr>
           <a:xfrm>
-            <a:off x="987552" y="4768596"/>
-            <a:ext cx="10094976" cy="355092"/>
+            <a:off x="6492240" y="3886200"/>
+            <a:ext cx="4645152" cy="475488"/>
           </a:xfrm>
           <a:prstGeom prst="rect">
             <a:avLst/>
@@ -12474,14 +12883,14 @@
           <a:bodyPr wrap="square" lIns="0" tIns="25400" rIns="25400" bIns="0" rtlCol="0" anchor="ctr"/>
           <a:lstStyle/>
           <a:p>
-            <a:pPr algn="l" indent="0" marL="0">
+            <a:pPr algn="ctr" indent="0" marL="0">
               <a:lnSpc>
                 <a:spcPct val="120000"/>
               </a:lnSpc>
               <a:buNone/>
             </a:pPr>
             <a:r>
-              <a:rPr lang="en-US" sz="2200" dirty="0">
+              <a:rPr lang="en-US" sz="1800" dirty="0">
                 <a:solidFill>
                   <a:srgbClr val="18181B"/>
                 </a:solidFill>
@@ -12489,22 +12898,22 @@
                 <a:ea typeface="Pretendard" pitchFamily="34" charset="-122"/>
                 <a:cs typeface="Pretendard" pitchFamily="34" charset="-120"/>
               </a:rPr>
-              <a:t>Icon and Text Aside</a:t>
+              <a:t>10  Icon and Text Aside</a:t>
             </a:r>
-            <a:endParaRPr lang="en-US" sz="2200" dirty="0"/>
+            <a:endParaRPr lang="en-US" sz="1800" dirty="0"/>
           </a:p>
         </p:txBody>
       </p:sp>
       <p:sp>
         <p:nvSpPr>
-          <p:cNvPr id="20" name="Text 18"/>
+          <p:cNvPr id="34" name="Text 32"/>
           <p:cNvSpPr txBox="1"/>
           <p:nvPr/>
         </p:nvSpPr>
         <p:spPr>
           <a:xfrm>
-            <a:off x="987552" y="5123688"/>
-            <a:ext cx="10094976" cy="355092"/>
+            <a:off x="6492240" y="4690872"/>
+            <a:ext cx="4645152" cy="475488"/>
           </a:xfrm>
           <a:prstGeom prst="rect">
             <a:avLst/>
@@ -12516,14 +12925,14 @@
           <a:bodyPr wrap="square" lIns="0" tIns="25400" rIns="25400" bIns="0" rtlCol="0" anchor="ctr"/>
           <a:lstStyle/>
           <a:p>
-            <a:pPr algn="l" indent="0" marL="0">
+            <a:pPr algn="ctr" indent="0" marL="0">
               <a:lnSpc>
                 <a:spcPct val="120000"/>
               </a:lnSpc>
               <a:buNone/>
             </a:pPr>
             <a:r>
-              <a:rPr lang="en-US" sz="2200" dirty="0">
+              <a:rPr lang="en-US" sz="1800" dirty="0">
                 <a:solidFill>
                   <a:srgbClr val="18181B"/>
                 </a:solidFill>
@@ -12531,22 +12940,22 @@
                 <a:ea typeface="Pretendard" pitchFamily="34" charset="-122"/>
                 <a:cs typeface="Pretendard" pitchFamily="34" charset="-120"/>
               </a:rPr>
-              <a:t>Overflow Guard</a:t>
+              <a:t>11  Overflow Guard</a:t>
             </a:r>
-            <a:endParaRPr lang="en-US" sz="2200" dirty="0"/>
+            <a:endParaRPr lang="en-US" sz="1800" dirty="0"/>
           </a:p>
         </p:txBody>
       </p:sp>
       <p:sp>
         <p:nvSpPr>
-          <p:cNvPr id="21" name="Text 19"/>
+          <p:cNvPr id="35" name="Text 33"/>
           <p:cNvSpPr txBox="1"/>
           <p:nvPr/>
         </p:nvSpPr>
         <p:spPr>
           <a:xfrm>
-            <a:off x="987552" y="5478780"/>
-            <a:ext cx="10094976" cy="355092"/>
+            <a:off x="6492240" y="5486400"/>
+            <a:ext cx="4645152" cy="475488"/>
           </a:xfrm>
           <a:prstGeom prst="rect">
             <a:avLst/>
@@ -12558,14 +12967,14 @@
           <a:bodyPr wrap="square" lIns="0" tIns="25400" rIns="25400" bIns="0" rtlCol="0" anchor="ctr"/>
           <a:lstStyle/>
           <a:p>
-            <a:pPr algn="l" indent="0" marL="0">
+            <a:pPr algn="ctr" indent="0" marL="0">
               <a:lnSpc>
                 <a:spcPct val="120000"/>
               </a:lnSpc>
               <a:buNone/>
             </a:pPr>
             <a:r>
-              <a:rPr lang="en-US" sz="2200" dirty="0">
+              <a:rPr lang="en-US" sz="1800" dirty="0">
                 <a:solidFill>
                   <a:srgbClr val="18181B"/>
                 </a:solidFill>
@@ -12573,9 +12982,9 @@
                 <a:ea typeface="Pretendard" pitchFamily="34" charset="-122"/>
                 <a:cs typeface="Pretendard" pitchFamily="34" charset="-120"/>
               </a:rPr>
-              <a:t>Actions Output Review</a:t>
+              <a:t>12  Actions Output Review</a:t>
             </a:r>
-            <a:endParaRPr lang="en-US" sz="2200" dirty="0"/>
+            <a:endParaRPr lang="en-US" sz="1800" dirty="0"/>
           </a:p>
         </p:txBody>
       </p:sp>
@@ -13330,8 +13739,37 @@
         </p:nvSpPr>
         <p:spPr>
           <a:xfrm>
-            <a:off x="914400" y="1417320"/>
-            <a:ext cx="73152" cy="868680"/>
+            <a:off x="786384" y="1956816"/>
+            <a:ext cx="32004" cy="3483864"/>
+          </a:xfrm>
+          <a:prstGeom prst="rect">
+            <a:avLst/>
+          </a:prstGeom>
+          <a:solidFill>
+            <a:srgbClr val="111827">
+              <a:alpha val="80000"/>
+            </a:srgbClr>
+          </a:solidFill>
+          <a:ln w="12700">
+            <a:solidFill>
+              <a:srgbClr val="111827">
+                <a:alpha val="0"/>
+              </a:srgbClr>
+            </a:solidFill>
+            <a:prstDash val="solid"/>
+          </a:ln>
+        </p:spPr>
+      </p:sp>
+      <p:sp>
+        <p:nvSpPr>
+          <p:cNvPr id="9" name="Shape 7"/>
+          <p:cNvSpPr/>
+          <p:nvPr/>
+        </p:nvSpPr>
+        <p:spPr>
+          <a:xfrm>
+            <a:off x="914400" y="1865376"/>
+            <a:ext cx="73152" cy="1024128"/>
           </a:xfrm>
           <a:prstGeom prst="rect">
             <a:avLst/>
@@ -13351,14 +13789,14 @@
       </p:sp>
       <p:sp>
         <p:nvSpPr>
-          <p:cNvPr id="9" name="Shape 7"/>
-          <p:cNvSpPr/>
-          <p:nvPr/>
-        </p:nvSpPr>
-        <p:spPr>
-          <a:xfrm>
-            <a:off x="914400" y="2560320"/>
-            <a:ext cx="73152" cy="868680"/>
+          <p:cNvPr id="10" name="Shape 8"/>
+          <p:cNvSpPr/>
+          <p:nvPr/>
+        </p:nvSpPr>
+        <p:spPr>
+          <a:xfrm>
+            <a:off x="914400" y="3191256"/>
+            <a:ext cx="73152" cy="1024128"/>
           </a:xfrm>
           <a:prstGeom prst="rect">
             <a:avLst/>
@@ -13378,14 +13816,14 @@
       </p:sp>
       <p:sp>
         <p:nvSpPr>
-          <p:cNvPr id="10" name="Shape 8"/>
-          <p:cNvSpPr/>
-          <p:nvPr/>
-        </p:nvSpPr>
-        <p:spPr>
-          <a:xfrm>
-            <a:off x="914400" y="3703320"/>
-            <a:ext cx="73152" cy="868680"/>
+          <p:cNvPr id="11" name="Shape 9"/>
+          <p:cNvSpPr/>
+          <p:nvPr/>
+        </p:nvSpPr>
+        <p:spPr>
+          <a:xfrm>
+            <a:off x="914400" y="4507992"/>
+            <a:ext cx="73152" cy="1024128"/>
           </a:xfrm>
           <a:prstGeom prst="rect">
             <a:avLst/>
@@ -13405,7 +13843,7 @@
       </p:sp>
       <p:pic>
         <p:nvPicPr>
-          <p:cNvPr id="11" name="Image 0" descr="preencoded.png">    </p:cNvPr>
+          <p:cNvPr id="12" name="Image 0" descr="preencoded.png">    </p:cNvPr>
           <p:cNvPicPr>
             <a:picLocks noChangeAspect="1"/>
           </p:cNvPicPr>
@@ -13425,8 +13863,8 @@
         </p:blipFill>
         <p:spPr>
           <a:xfrm>
-            <a:off x="914400" y="1417320"/>
-            <a:ext cx="10241280" cy="868680"/>
+            <a:off x="914400" y="1865376"/>
+            <a:ext cx="10241280" cy="1024128"/>
           </a:xfrm>
           <a:prstGeom prst="rect">
             <a:avLst/>
@@ -13435,14 +13873,14 @@
       </p:pic>
       <p:sp>
         <p:nvSpPr>
-          <p:cNvPr id="12" name="Shape 9"/>
-          <p:cNvSpPr/>
-          <p:nvPr/>
-        </p:nvSpPr>
-        <p:spPr>
-          <a:xfrm>
-            <a:off x="914400" y="1417320"/>
-            <a:ext cx="10241280" cy="868680"/>
+          <p:cNvPr id="13" name="Shape 10"/>
+          <p:cNvSpPr/>
+          <p:nvPr/>
+        </p:nvSpPr>
+        <p:spPr>
+          <a:xfrm>
+            <a:off x="914400" y="1865376"/>
+            <a:ext cx="10241280" cy="1024128"/>
           </a:xfrm>
           <a:prstGeom prst="rect">
             <a:avLst/>
@@ -13471,7 +13909,7 @@
       </p:sp>
       <p:pic>
         <p:nvPicPr>
-          <p:cNvPr id="13" name="Image 1" descr="preencoded.png">    </p:cNvPr>
+          <p:cNvPr id="14" name="Image 1" descr="preencoded.png">    </p:cNvPr>
           <p:cNvPicPr>
             <a:picLocks noChangeAspect="1"/>
           </p:cNvPicPr>
@@ -13491,8 +13929,8 @@
         </p:blipFill>
         <p:spPr>
           <a:xfrm>
-            <a:off x="914400" y="2560320"/>
-            <a:ext cx="10241280" cy="868680"/>
+            <a:off x="914400" y="3191256"/>
+            <a:ext cx="10241280" cy="1024128"/>
           </a:xfrm>
           <a:prstGeom prst="rect">
             <a:avLst/>
@@ -13501,14 +13939,14 @@
       </p:pic>
       <p:sp>
         <p:nvSpPr>
-          <p:cNvPr id="14" name="Shape 10"/>
-          <p:cNvSpPr/>
-          <p:nvPr/>
-        </p:nvSpPr>
-        <p:spPr>
-          <a:xfrm>
-            <a:off x="914400" y="2560320"/>
-            <a:ext cx="10241280" cy="868680"/>
+          <p:cNvPr id="15" name="Shape 11"/>
+          <p:cNvSpPr/>
+          <p:nvPr/>
+        </p:nvSpPr>
+        <p:spPr>
+          <a:xfrm>
+            <a:off x="914400" y="3191256"/>
+            <a:ext cx="10241280" cy="1024128"/>
           </a:xfrm>
           <a:prstGeom prst="rect">
             <a:avLst/>
@@ -13537,7 +13975,7 @@
       </p:sp>
       <p:pic>
         <p:nvPicPr>
-          <p:cNvPr id="15" name="Image 2" descr="preencoded.png">    </p:cNvPr>
+          <p:cNvPr id="16" name="Image 2" descr="preencoded.png">    </p:cNvPr>
           <p:cNvPicPr>
             <a:picLocks noChangeAspect="1"/>
           </p:cNvPicPr>
@@ -13557,8 +13995,8 @@
         </p:blipFill>
         <p:spPr>
           <a:xfrm>
-            <a:off x="914400" y="3703320"/>
-            <a:ext cx="10241280" cy="868680"/>
+            <a:off x="914400" y="4507992"/>
+            <a:ext cx="10241280" cy="1024128"/>
           </a:xfrm>
           <a:prstGeom prst="rect">
             <a:avLst/>
@@ -13567,14 +14005,14 @@
       </p:pic>
       <p:sp>
         <p:nvSpPr>
-          <p:cNvPr id="16" name="Shape 11"/>
-          <p:cNvSpPr/>
-          <p:nvPr/>
-        </p:nvSpPr>
-        <p:spPr>
-          <a:xfrm>
-            <a:off x="914400" y="3703320"/>
-            <a:ext cx="10241280" cy="868680"/>
+          <p:cNvPr id="17" name="Shape 12"/>
+          <p:cNvSpPr/>
+          <p:nvPr/>
+        </p:nvSpPr>
+        <p:spPr>
+          <a:xfrm>
+            <a:off x="914400" y="4507992"/>
+            <a:ext cx="10241280" cy="1024128"/>
           </a:xfrm>
           <a:prstGeom prst="rect">
             <a:avLst/>
@@ -13603,7 +14041,7 @@
       </p:sp>
       <p:sp>
         <p:nvSpPr>
-          <p:cNvPr id="17" name="Text 12"/>
+          <p:cNvPr id="18" name="Text 13"/>
           <p:cNvSpPr txBox="1"/>
           <p:nvPr/>
         </p:nvSpPr>
@@ -13645,18 +14083,18 @@
       </p:sp>
       <p:sp>
         <p:nvSpPr>
-          <p:cNvPr id="18" name="Shape 13"/>
-          <p:cNvSpPr/>
-          <p:nvPr/>
-        </p:nvSpPr>
-        <p:spPr>
-          <a:xfrm>
-            <a:off x="1097280" y="1623060"/>
-            <a:ext cx="457200" cy="457200"/>
+          <p:cNvPr id="19" name="Shape 14"/>
+          <p:cNvSpPr/>
+          <p:nvPr/>
+        </p:nvSpPr>
+        <p:spPr>
+          <a:xfrm>
+            <a:off x="1097280" y="2140428"/>
+            <a:ext cx="474025" cy="474025"/>
           </a:xfrm>
           <a:prstGeom prst="roundRect">
             <a:avLst>
-              <a:gd name="adj" fmla="val 8000"/>
+              <a:gd name="adj" fmla="val 7716"/>
             </a:avLst>
           </a:prstGeom>
           <a:solidFill>
@@ -13672,7 +14110,7 @@
       </p:sp>
       <p:pic>
         <p:nvPicPr>
-          <p:cNvPr id="19" name="Image 3" descr="flow icon from tabler-icons (MIT)">    </p:cNvPr>
+          <p:cNvPr id="20" name="Image 3" descr="flow icon from tabler-icons (MIT)">    </p:cNvPr>
           <p:cNvPicPr>
             <a:picLocks noChangeAspect="1"/>
           </p:cNvPicPr>
@@ -13692,8 +14130,8 @@
         </p:blipFill>
         <p:spPr>
           <a:xfrm>
-            <a:off x="1170432" y="1696212"/>
-            <a:ext cx="310896" cy="310896"/>
+            <a:off x="1170432" y="2213580"/>
+            <a:ext cx="327721" cy="327721"/>
           </a:xfrm>
           <a:prstGeom prst="rect">
             <a:avLst/>
@@ -13702,14 +14140,14 @@
       </p:pic>
       <p:sp>
         <p:nvSpPr>
-          <p:cNvPr id="20" name="Text 14"/>
+          <p:cNvPr id="21" name="Text 15"/>
           <p:cNvSpPr txBox="1"/>
           <p:nvPr/>
         </p:nvSpPr>
         <p:spPr>
           <a:xfrm>
-            <a:off x="1682496" y="1508760"/>
-            <a:ext cx="9272016" cy="685800"/>
+            <a:off x="1699321" y="1957548"/>
+            <a:ext cx="9255191" cy="839785"/>
           </a:xfrm>
           <a:prstGeom prst="rect">
             <a:avLst/>
@@ -13761,18 +14199,18 @@
       </p:sp>
       <p:sp>
         <p:nvSpPr>
-          <p:cNvPr id="21" name="Shape 15"/>
-          <p:cNvSpPr/>
-          <p:nvPr/>
-        </p:nvSpPr>
-        <p:spPr>
-          <a:xfrm>
-            <a:off x="1097280" y="2766060"/>
-            <a:ext cx="457200" cy="457200"/>
+          <p:cNvPr id="22" name="Shape 16"/>
+          <p:cNvSpPr/>
+          <p:nvPr/>
+        </p:nvSpPr>
+        <p:spPr>
+          <a:xfrm>
+            <a:off x="1097280" y="3466308"/>
+            <a:ext cx="474025" cy="474025"/>
           </a:xfrm>
           <a:prstGeom prst="roundRect">
             <a:avLst>
-              <a:gd name="adj" fmla="val 8000"/>
+              <a:gd name="adj" fmla="val 7716"/>
             </a:avLst>
           </a:prstGeom>
           <a:solidFill>
@@ -13788,7 +14226,7 @@
       </p:sp>
       <p:pic>
         <p:nvPicPr>
-          <p:cNvPr id="22" name="Image 4" descr="verified icon from tabler-icons (MIT)">    </p:cNvPr>
+          <p:cNvPr id="23" name="Image 4" descr="verified icon from tabler-icons (MIT)">    </p:cNvPr>
           <p:cNvPicPr>
             <a:picLocks noChangeAspect="1"/>
           </p:cNvPicPr>
@@ -13808,8 +14246,8 @@
         </p:blipFill>
         <p:spPr>
           <a:xfrm>
-            <a:off x="1170432" y="2839212"/>
-            <a:ext cx="310896" cy="310896"/>
+            <a:off x="1170432" y="3539460"/>
+            <a:ext cx="327721" cy="327721"/>
           </a:xfrm>
           <a:prstGeom prst="rect">
             <a:avLst/>
@@ -13818,14 +14256,14 @@
       </p:pic>
       <p:sp>
         <p:nvSpPr>
-          <p:cNvPr id="23" name="Text 16"/>
+          <p:cNvPr id="24" name="Text 17"/>
           <p:cNvSpPr txBox="1"/>
           <p:nvPr/>
         </p:nvSpPr>
         <p:spPr>
           <a:xfrm>
-            <a:off x="1682496" y="2651760"/>
-            <a:ext cx="9272016" cy="685800"/>
+            <a:off x="1699321" y="3283428"/>
+            <a:ext cx="9255191" cy="839785"/>
           </a:xfrm>
           <a:prstGeom prst="rect">
             <a:avLst/>
@@ -13877,18 +14315,18 @@
       </p:sp>
       <p:sp>
         <p:nvSpPr>
-          <p:cNvPr id="24" name="Shape 17"/>
-          <p:cNvSpPr/>
-          <p:nvPr/>
-        </p:nvSpPr>
-        <p:spPr>
-          <a:xfrm>
-            <a:off x="1097280" y="3909060"/>
-            <a:ext cx="457200" cy="457200"/>
+          <p:cNvPr id="25" name="Shape 18"/>
+          <p:cNvSpPr/>
+          <p:nvPr/>
+        </p:nvSpPr>
+        <p:spPr>
+          <a:xfrm>
+            <a:off x="1097280" y="4783044"/>
+            <a:ext cx="474025" cy="474025"/>
           </a:xfrm>
           <a:prstGeom prst="roundRect">
             <a:avLst>
-              <a:gd name="adj" fmla="val 8000"/>
+              <a:gd name="adj" fmla="val 7716"/>
             </a:avLst>
           </a:prstGeom>
           <a:solidFill>
@@ -13904,7 +14342,7 @@
       </p:sp>
       <p:pic>
         <p:nvPicPr>
-          <p:cNvPr id="25" name="Image 5" descr="spark icon from tabler-icons (MIT)">    </p:cNvPr>
+          <p:cNvPr id="26" name="Image 5" descr="spark icon from tabler-icons (MIT)">    </p:cNvPr>
           <p:cNvPicPr>
             <a:picLocks noChangeAspect="1"/>
           </p:cNvPicPr>
@@ -13924,8 +14362,8 @@
         </p:blipFill>
         <p:spPr>
           <a:xfrm>
-            <a:off x="1170432" y="3982212"/>
-            <a:ext cx="310896" cy="310896"/>
+            <a:off x="1170432" y="4856196"/>
+            <a:ext cx="327721" cy="327721"/>
           </a:xfrm>
           <a:prstGeom prst="rect">
             <a:avLst/>
@@ -13934,14 +14372,14 @@
       </p:pic>
       <p:sp>
         <p:nvSpPr>
-          <p:cNvPr id="26" name="Text 18"/>
+          <p:cNvPr id="27" name="Text 19"/>
           <p:cNvSpPr txBox="1"/>
           <p:nvPr/>
         </p:nvSpPr>
         <p:spPr>
           <a:xfrm>
-            <a:off x="1682496" y="3794760"/>
-            <a:ext cx="9272016" cy="685800"/>
+            <a:off x="1699321" y="4600164"/>
+            <a:ext cx="9255191" cy="839785"/>
           </a:xfrm>
           <a:prstGeom prst="rect">
             <a:avLst/>
@@ -14611,8 +15049,37 @@
         </p:nvSpPr>
         <p:spPr>
           <a:xfrm>
-            <a:off x="914400" y="1417320"/>
-            <a:ext cx="73152" cy="868680"/>
+            <a:off x="786384" y="1956816"/>
+            <a:ext cx="32004" cy="3483864"/>
+          </a:xfrm>
+          <a:prstGeom prst="rect">
+            <a:avLst/>
+          </a:prstGeom>
+          <a:solidFill>
+            <a:srgbClr val="111827">
+              <a:alpha val="80000"/>
+            </a:srgbClr>
+          </a:solidFill>
+          <a:ln w="12700">
+            <a:solidFill>
+              <a:srgbClr val="111827">
+                <a:alpha val="0"/>
+              </a:srgbClr>
+            </a:solidFill>
+            <a:prstDash val="solid"/>
+          </a:ln>
+        </p:spPr>
+      </p:sp>
+      <p:sp>
+        <p:nvSpPr>
+          <p:cNvPr id="9" name="Shape 7"/>
+          <p:cNvSpPr/>
+          <p:nvPr/>
+        </p:nvSpPr>
+        <p:spPr>
+          <a:xfrm>
+            <a:off x="914400" y="1865376"/>
+            <a:ext cx="73152" cy="1024128"/>
           </a:xfrm>
           <a:prstGeom prst="rect">
             <a:avLst/>
@@ -14632,14 +15099,14 @@
       </p:sp>
       <p:sp>
         <p:nvSpPr>
-          <p:cNvPr id="9" name="Shape 7"/>
-          <p:cNvSpPr/>
-          <p:nvPr/>
-        </p:nvSpPr>
-        <p:spPr>
-          <a:xfrm>
-            <a:off x="914400" y="2560320"/>
-            <a:ext cx="73152" cy="868680"/>
+          <p:cNvPr id="10" name="Shape 8"/>
+          <p:cNvSpPr/>
+          <p:nvPr/>
+        </p:nvSpPr>
+        <p:spPr>
+          <a:xfrm>
+            <a:off x="914400" y="3191256"/>
+            <a:ext cx="73152" cy="1024128"/>
           </a:xfrm>
           <a:prstGeom prst="rect">
             <a:avLst/>
@@ -14659,14 +15126,14 @@
       </p:sp>
       <p:sp>
         <p:nvSpPr>
-          <p:cNvPr id="10" name="Shape 8"/>
-          <p:cNvSpPr/>
-          <p:nvPr/>
-        </p:nvSpPr>
-        <p:spPr>
-          <a:xfrm>
-            <a:off x="914400" y="3703320"/>
-            <a:ext cx="73152" cy="868680"/>
+          <p:cNvPr id="11" name="Shape 9"/>
+          <p:cNvSpPr/>
+          <p:nvPr/>
+        </p:nvSpPr>
+        <p:spPr>
+          <a:xfrm>
+            <a:off x="914400" y="4507992"/>
+            <a:ext cx="73152" cy="1024128"/>
           </a:xfrm>
           <a:prstGeom prst="rect">
             <a:avLst/>
@@ -14686,7 +15153,7 @@
       </p:sp>
       <p:pic>
         <p:nvPicPr>
-          <p:cNvPr id="11" name="Image 0" descr="preencoded.png">    </p:cNvPr>
+          <p:cNvPr id="12" name="Image 0" descr="preencoded.png">    </p:cNvPr>
           <p:cNvPicPr>
             <a:picLocks noChangeAspect="1"/>
           </p:cNvPicPr>
@@ -14706,8 +15173,8 @@
         </p:blipFill>
         <p:spPr>
           <a:xfrm>
-            <a:off x="914400" y="1417320"/>
-            <a:ext cx="10241280" cy="868680"/>
+            <a:off x="914400" y="1865376"/>
+            <a:ext cx="10241280" cy="1024128"/>
           </a:xfrm>
           <a:prstGeom prst="rect">
             <a:avLst/>
@@ -14716,14 +15183,14 @@
       </p:pic>
       <p:sp>
         <p:nvSpPr>
-          <p:cNvPr id="12" name="Shape 9"/>
-          <p:cNvSpPr/>
-          <p:nvPr/>
-        </p:nvSpPr>
-        <p:spPr>
-          <a:xfrm>
-            <a:off x="914400" y="1417320"/>
-            <a:ext cx="10241280" cy="868680"/>
+          <p:cNvPr id="13" name="Shape 10"/>
+          <p:cNvSpPr/>
+          <p:nvPr/>
+        </p:nvSpPr>
+        <p:spPr>
+          <a:xfrm>
+            <a:off x="914400" y="1865376"/>
+            <a:ext cx="10241280" cy="1024128"/>
           </a:xfrm>
           <a:prstGeom prst="rect">
             <a:avLst/>
@@ -14752,7 +15219,7 @@
       </p:sp>
       <p:pic>
         <p:nvPicPr>
-          <p:cNvPr id="13" name="Image 1" descr="preencoded.png">    </p:cNvPr>
+          <p:cNvPr id="14" name="Image 1" descr="preencoded.png">    </p:cNvPr>
           <p:cNvPicPr>
             <a:picLocks noChangeAspect="1"/>
           </p:cNvPicPr>
@@ -14772,8 +15239,8 @@
         </p:blipFill>
         <p:spPr>
           <a:xfrm>
-            <a:off x="914400" y="2560320"/>
-            <a:ext cx="10241280" cy="868680"/>
+            <a:off x="914400" y="3191256"/>
+            <a:ext cx="10241280" cy="1024128"/>
           </a:xfrm>
           <a:prstGeom prst="rect">
             <a:avLst/>
@@ -14782,14 +15249,14 @@
       </p:pic>
       <p:sp>
         <p:nvSpPr>
-          <p:cNvPr id="14" name="Shape 10"/>
-          <p:cNvSpPr/>
-          <p:nvPr/>
-        </p:nvSpPr>
-        <p:spPr>
-          <a:xfrm>
-            <a:off x="914400" y="2560320"/>
-            <a:ext cx="10241280" cy="868680"/>
+          <p:cNvPr id="15" name="Shape 11"/>
+          <p:cNvSpPr/>
+          <p:nvPr/>
+        </p:nvSpPr>
+        <p:spPr>
+          <a:xfrm>
+            <a:off x="914400" y="3191256"/>
+            <a:ext cx="10241280" cy="1024128"/>
           </a:xfrm>
           <a:prstGeom prst="rect">
             <a:avLst/>
@@ -14818,7 +15285,7 @@
       </p:sp>
       <p:pic>
         <p:nvPicPr>
-          <p:cNvPr id="15" name="Image 2" descr="preencoded.png">    </p:cNvPr>
+          <p:cNvPr id="16" name="Image 2" descr="preencoded.png">    </p:cNvPr>
           <p:cNvPicPr>
             <a:picLocks noChangeAspect="1"/>
           </p:cNvPicPr>
@@ -14838,8 +15305,8 @@
         </p:blipFill>
         <p:spPr>
           <a:xfrm>
-            <a:off x="914400" y="3703320"/>
-            <a:ext cx="10241280" cy="868680"/>
+            <a:off x="914400" y="4507992"/>
+            <a:ext cx="10241280" cy="1024128"/>
           </a:xfrm>
           <a:prstGeom prst="rect">
             <a:avLst/>
@@ -14848,14 +15315,14 @@
       </p:pic>
       <p:sp>
         <p:nvSpPr>
-          <p:cNvPr id="16" name="Shape 11"/>
-          <p:cNvSpPr/>
-          <p:nvPr/>
-        </p:nvSpPr>
-        <p:spPr>
-          <a:xfrm>
-            <a:off x="914400" y="3703320"/>
-            <a:ext cx="10241280" cy="868680"/>
+          <p:cNvPr id="17" name="Shape 12"/>
+          <p:cNvSpPr/>
+          <p:nvPr/>
+        </p:nvSpPr>
+        <p:spPr>
+          <a:xfrm>
+            <a:off x="914400" y="4507992"/>
+            <a:ext cx="10241280" cy="1024128"/>
           </a:xfrm>
           <a:prstGeom prst="rect">
             <a:avLst/>
@@ -14884,7 +15351,7 @@
       </p:sp>
       <p:sp>
         <p:nvSpPr>
-          <p:cNvPr id="17" name="Text 12"/>
+          <p:cNvPr id="18" name="Text 13"/>
           <p:cNvSpPr txBox="1"/>
           <p:nvPr/>
         </p:nvSpPr>
@@ -14926,18 +15393,18 @@
       </p:sp>
       <p:sp>
         <p:nvSpPr>
-          <p:cNvPr id="18" name="Shape 13"/>
-          <p:cNvSpPr/>
-          <p:nvPr/>
-        </p:nvSpPr>
-        <p:spPr>
-          <a:xfrm>
-            <a:off x="1097280" y="1623060"/>
-            <a:ext cx="457200" cy="457200"/>
+          <p:cNvPr id="19" name="Shape 14"/>
+          <p:cNvSpPr/>
+          <p:nvPr/>
+        </p:nvSpPr>
+        <p:spPr>
+          <a:xfrm>
+            <a:off x="1097280" y="2140428"/>
+            <a:ext cx="474025" cy="474025"/>
           </a:xfrm>
           <a:prstGeom prst="roundRect">
             <a:avLst>
-              <a:gd name="adj" fmla="val 8000"/>
+              <a:gd name="adj" fmla="val 7716"/>
             </a:avLst>
           </a:prstGeom>
           <a:solidFill>
@@ -14953,7 +15420,7 @@
       </p:sp>
       <p:pic>
         <p:nvPicPr>
-          <p:cNvPr id="19" name="Image 3" descr="flow icon from tabler-icons (MIT)">    </p:cNvPr>
+          <p:cNvPr id="20" name="Image 3" descr="flow icon from tabler-icons (MIT)">    </p:cNvPr>
           <p:cNvPicPr>
             <a:picLocks noChangeAspect="1"/>
           </p:cNvPicPr>
@@ -14973,8 +15440,8 @@
         </p:blipFill>
         <p:spPr>
           <a:xfrm>
-            <a:off x="1170432" y="1696212"/>
-            <a:ext cx="310896" cy="310896"/>
+            <a:off x="1170432" y="2213580"/>
+            <a:ext cx="327721" cy="327721"/>
           </a:xfrm>
           <a:prstGeom prst="rect">
             <a:avLst/>
@@ -14983,14 +15450,14 @@
       </p:pic>
       <p:sp>
         <p:nvSpPr>
-          <p:cNvPr id="20" name="Text 14"/>
+          <p:cNvPr id="21" name="Text 15"/>
           <p:cNvSpPr txBox="1"/>
           <p:nvPr/>
         </p:nvSpPr>
         <p:spPr>
           <a:xfrm>
-            <a:off x="1682496" y="1508760"/>
-            <a:ext cx="9272016" cy="685800"/>
+            <a:off x="1699321" y="1957548"/>
+            <a:ext cx="9255191" cy="839785"/>
           </a:xfrm>
           <a:prstGeom prst="rect">
             <a:avLst/>
@@ -15017,7 +15484,7 @@
                 <a:ea typeface="Pretendard" pitchFamily="34" charset="-122"/>
                 <a:cs typeface="Pretendard" pitchFamily="34" charset="-120"/>
               </a:rPr>
-              <a:t>Plain / clean</a:t>
+              <a:t>Clean / minimalism</a:t>
             </a:r>
             <a:pPr algn="l" indent="0" marL="0">
               <a:lnSpc>
@@ -15034,7 +15501,7 @@
                 <a:ea typeface="Pretendard" pitchFamily="34" charset="-122"/>
                 <a:cs typeface="Pretendard" pitchFamily="34" charset="-120"/>
               </a:rPr>
-              <a:t>  low-decoration baselines.</a:t>
+              <a:t>  restrained structural baselines.</a:t>
             </a:r>
             <a:endParaRPr lang="en-US" sz="2200" dirty="0"/>
           </a:p>
@@ -15042,18 +15509,18 @@
       </p:sp>
       <p:sp>
         <p:nvSpPr>
-          <p:cNvPr id="21" name="Shape 15"/>
-          <p:cNvSpPr/>
-          <p:nvPr/>
-        </p:nvSpPr>
-        <p:spPr>
-          <a:xfrm>
-            <a:off x="1097280" y="2766060"/>
-            <a:ext cx="457200" cy="457200"/>
+          <p:cNvPr id="22" name="Shape 16"/>
+          <p:cNvSpPr/>
+          <p:nvPr/>
+        </p:nvSpPr>
+        <p:spPr>
+          <a:xfrm>
+            <a:off x="1097280" y="3466308"/>
+            <a:ext cx="474025" cy="474025"/>
           </a:xfrm>
           <a:prstGeom prst="roundRect">
             <a:avLst>
-              <a:gd name="adj" fmla="val 8000"/>
+              <a:gd name="adj" fmla="val 7716"/>
             </a:avLst>
           </a:prstGeom>
           <a:solidFill>
@@ -15069,7 +15536,7 @@
       </p:sp>
       <p:pic>
         <p:nvPicPr>
-          <p:cNvPr id="22" name="Image 4" descr="verified icon from tabler-icons (MIT)">    </p:cNvPr>
+          <p:cNvPr id="23" name="Image 4" descr="verified icon from tabler-icons (MIT)">    </p:cNvPr>
           <p:cNvPicPr>
             <a:picLocks noChangeAspect="1"/>
           </p:cNvPicPr>
@@ -15089,8 +15556,8 @@
         </p:blipFill>
         <p:spPr>
           <a:xfrm>
-            <a:off x="1170432" y="2839212"/>
-            <a:ext cx="310896" cy="310896"/>
+            <a:off x="1170432" y="3539460"/>
+            <a:ext cx="327721" cy="327721"/>
           </a:xfrm>
           <a:prstGeom prst="rect">
             <a:avLst/>
@@ -15099,14 +15566,14 @@
       </p:pic>
       <p:sp>
         <p:nvSpPr>
-          <p:cNvPr id="23" name="Text 16"/>
+          <p:cNvPr id="24" name="Text 17"/>
           <p:cNvSpPr txBox="1"/>
           <p:nvPr/>
         </p:nvSpPr>
         <p:spPr>
           <a:xfrm>
-            <a:off x="1682496" y="2651760"/>
-            <a:ext cx="9272016" cy="685800"/>
+            <a:off x="1699321" y="3283428"/>
+            <a:ext cx="9255191" cy="839785"/>
           </a:xfrm>
           <a:prstGeom prst="rect">
             <a:avLst/>
@@ -15158,18 +15625,18 @@
       </p:sp>
       <p:sp>
         <p:nvSpPr>
-          <p:cNvPr id="24" name="Shape 17"/>
-          <p:cNvSpPr/>
-          <p:nvPr/>
-        </p:nvSpPr>
-        <p:spPr>
-          <a:xfrm>
-            <a:off x="1097280" y="3909060"/>
-            <a:ext cx="457200" cy="457200"/>
+          <p:cNvPr id="25" name="Shape 18"/>
+          <p:cNvSpPr/>
+          <p:nvPr/>
+        </p:nvSpPr>
+        <p:spPr>
+          <a:xfrm>
+            <a:off x="1097280" y="4783044"/>
+            <a:ext cx="474025" cy="474025"/>
           </a:xfrm>
           <a:prstGeom prst="roundRect">
             <a:avLst>
-              <a:gd name="adj" fmla="val 8000"/>
+              <a:gd name="adj" fmla="val 7716"/>
             </a:avLst>
           </a:prstGeom>
           <a:solidFill>
@@ -15185,7 +15652,7 @@
       </p:sp>
       <p:pic>
         <p:nvPicPr>
-          <p:cNvPr id="25" name="Image 5" descr="spark icon from tabler-icons (MIT)">    </p:cNvPr>
+          <p:cNvPr id="26" name="Image 5" descr="spark icon from tabler-icons (MIT)">    </p:cNvPr>
           <p:cNvPicPr>
             <a:picLocks noChangeAspect="1"/>
           </p:cNvPicPr>
@@ -15205,8 +15672,8 @@
         </p:blipFill>
         <p:spPr>
           <a:xfrm>
-            <a:off x="1170432" y="3982212"/>
-            <a:ext cx="310896" cy="310896"/>
+            <a:off x="1170432" y="4856196"/>
+            <a:ext cx="327721" cy="327721"/>
           </a:xfrm>
           <a:prstGeom prst="rect">
             <a:avLst/>
@@ -15215,14 +15682,14 @@
       </p:pic>
       <p:sp>
         <p:nvSpPr>
-          <p:cNvPr id="26" name="Text 18"/>
+          <p:cNvPr id="27" name="Text 19"/>
           <p:cNvSpPr txBox="1"/>
           <p:nvPr/>
         </p:nvSpPr>
         <p:spPr>
           <a:xfrm>
-            <a:off x="1682496" y="3794760"/>
-            <a:ext cx="9272016" cy="685800"/>
+            <a:off x="1699321" y="4600164"/>
+            <a:ext cx="9255191" cy="839785"/>
           </a:xfrm>
           <a:prstGeom prst="rect">
             <a:avLst/>

--- a/docs/theme-preview/pptx/magazine.pptx
+++ b/docs/theme-preview/pptx/magazine.pptx
@@ -9427,7 +9427,7 @@
       </p:sp>
       <p:pic>
         <p:nvPicPr>
-          <p:cNvPr id="22" name="Image 4" descr="flow icon from tabler-icons (MIT)">    </p:cNvPr>
+          <p:cNvPr id="22" name="Image 4" descr="article icon from tabler-icons (MIT)">    </p:cNvPr>
           <p:cNvPicPr>
             <a:picLocks noChangeAspect="1"/>
           </p:cNvPicPr>
@@ -9543,7 +9543,7 @@
       </p:sp>
       <p:pic>
         <p:nvPicPr>
-          <p:cNvPr id="25" name="Image 5" descr="verified icon from tabler-icons (MIT)">    </p:cNvPr>
+          <p:cNvPr id="25" name="Image 5" descr="article icon from tabler-icons (MIT)">    </p:cNvPr>
           <p:cNvPicPr>
             <a:picLocks noChangeAspect="1"/>
           </p:cNvPicPr>
@@ -9659,7 +9659,7 @@
       </p:sp>
       <p:pic>
         <p:nvPicPr>
-          <p:cNvPr id="28" name="Image 6" descr="spark icon from tabler-icons (MIT)">    </p:cNvPr>
+          <p:cNvPr id="28" name="Image 6" descr="article icon from tabler-icons (MIT)">    </p:cNvPr>
           <p:cNvPicPr>
             <a:picLocks noChangeAspect="1"/>
           </p:cNvPicPr>
@@ -9775,7 +9775,7 @@
       </p:sp>
       <p:pic>
         <p:nvPicPr>
-          <p:cNvPr id="31" name="Image 7" descr="chart icon from tabler-icons (MIT)">    </p:cNvPr>
+          <p:cNvPr id="31" name="Image 7" descr="table icon from tabler-icons (MIT)">    </p:cNvPr>
           <p:cNvPicPr>
             <a:picLocks noChangeAspect="1"/>
           </p:cNvPicPr>
@@ -10504,7 +10504,7 @@
       </p:sp>
       <p:pic>
         <p:nvPicPr>
-          <p:cNvPr id="22" name="Image 4" descr="flow icon from tabler-icons (MIT)">    </p:cNvPr>
+          <p:cNvPr id="22" name="Image 4" descr="verified icon from tabler-icons (MIT)">    </p:cNvPr>
           <p:cNvPicPr>
             <a:picLocks noChangeAspect="1"/>
           </p:cNvPicPr>
@@ -10620,7 +10620,7 @@
       </p:sp>
       <p:pic>
         <p:nvPicPr>
-          <p:cNvPr id="25" name="Image 5" descr="verified icon from tabler-icons (MIT)">    </p:cNvPr>
+          <p:cNvPr id="25" name="Image 5" descr="table icon from tabler-icons (MIT)">    </p:cNvPr>
           <p:cNvPicPr>
             <a:picLocks noChangeAspect="1"/>
           </p:cNvPicPr>
@@ -10736,7 +10736,7 @@
       </p:sp>
       <p:pic>
         <p:nvPicPr>
-          <p:cNvPr id="28" name="Image 6" descr="spark icon from tabler-icons (MIT)">    </p:cNvPr>
+          <p:cNvPr id="28" name="Image 6" descr="article icon from tabler-icons (MIT)">    </p:cNvPr>
           <p:cNvPicPr>
             <a:picLocks noChangeAspect="1"/>
           </p:cNvPicPr>
@@ -10852,7 +10852,7 @@
       </p:sp>
       <p:pic>
         <p:nvPicPr>
-          <p:cNvPr id="31" name="Image 7" descr="chart icon from tabler-icons (MIT)">    </p:cNvPr>
+          <p:cNvPr id="31" name="Image 7" descr="article icon from tabler-icons (MIT)">    </p:cNvPr>
           <p:cNvPicPr>
             <a:picLocks noChangeAspect="1"/>
           </p:cNvPicPr>
@@ -14110,7 +14110,7 @@
       </p:sp>
       <p:pic>
         <p:nvPicPr>
-          <p:cNvPr id="20" name="Image 3" descr="flow icon from tabler-icons (MIT)">    </p:cNvPr>
+          <p:cNvPr id="20" name="Image 3" descr="article icon from tabler-icons (MIT)">    </p:cNvPr>
           <p:cNvPicPr>
             <a:picLocks noChangeAspect="1"/>
           </p:cNvPicPr>
@@ -14226,7 +14226,7 @@
       </p:sp>
       <p:pic>
         <p:nvPicPr>
-          <p:cNvPr id="23" name="Image 4" descr="verified icon from tabler-icons (MIT)">    </p:cNvPr>
+          <p:cNvPr id="23" name="Image 4" descr="chart icon from tabler-icons (MIT)">    </p:cNvPr>
           <p:cNvPicPr>
             <a:picLocks noChangeAspect="1"/>
           </p:cNvPicPr>
@@ -14342,7 +14342,7 @@
       </p:sp>
       <p:pic>
         <p:nvPicPr>
-          <p:cNvPr id="26" name="Image 5" descr="spark icon from tabler-icons (MIT)">    </p:cNvPr>
+          <p:cNvPr id="26" name="Image 5" descr="article icon from tabler-icons (MIT)">    </p:cNvPr>
           <p:cNvPicPr>
             <a:picLocks noChangeAspect="1"/>
           </p:cNvPicPr>
@@ -15420,7 +15420,7 @@
       </p:sp>
       <p:pic>
         <p:nvPicPr>
-          <p:cNvPr id="20" name="Image 3" descr="flow icon from tabler-icons (MIT)">    </p:cNvPr>
+          <p:cNvPr id="20" name="Image 3" descr="article icon from tabler-icons (MIT)">    </p:cNvPr>
           <p:cNvPicPr>
             <a:picLocks noChangeAspect="1"/>
           </p:cNvPicPr>
@@ -15536,7 +15536,7 @@
       </p:sp>
       <p:pic>
         <p:nvPicPr>
-          <p:cNvPr id="23" name="Image 4" descr="verified icon from tabler-icons (MIT)">    </p:cNvPr>
+          <p:cNvPr id="23" name="Image 4" descr="article icon from tabler-icons (MIT)">    </p:cNvPr>
           <p:cNvPicPr>
             <a:picLocks noChangeAspect="1"/>
           </p:cNvPicPr>
@@ -15652,7 +15652,7 @@
       </p:sp>
       <p:pic>
         <p:nvPicPr>
-          <p:cNvPr id="26" name="Image 5" descr="spark icon from tabler-icons (MIT)">    </p:cNvPr>
+          <p:cNvPr id="26" name="Image 5" descr="article icon from tabler-icons (MIT)">    </p:cNvPr>
           <p:cNvPicPr>
             <a:picLocks noChangeAspect="1"/>
           </p:cNvPicPr>
@@ -16794,7 +16794,7 @@
       </p:sp>
       <p:pic>
         <p:nvPicPr>
-          <p:cNvPr id="22" name="Image 4" descr="flow icon from tabler-icons (MIT)">    </p:cNvPr>
+          <p:cNvPr id="22" name="Image 4" descr="table icon from tabler-icons (MIT)">    </p:cNvPr>
           <p:cNvPicPr>
             <a:picLocks noChangeAspect="1"/>
           </p:cNvPicPr>
@@ -16910,7 +16910,7 @@
       </p:sp>
       <p:pic>
         <p:nvPicPr>
-          <p:cNvPr id="25" name="Image 5" descr="verified icon from tabler-icons (MIT)">    </p:cNvPr>
+          <p:cNvPr id="25" name="Image 5" descr="article icon from tabler-icons (MIT)">    </p:cNvPr>
           <p:cNvPicPr>
             <a:picLocks noChangeAspect="1"/>
           </p:cNvPicPr>
@@ -17026,7 +17026,7 @@
       </p:sp>
       <p:pic>
         <p:nvPicPr>
-          <p:cNvPr id="28" name="Image 6" descr="spark icon from tabler-icons (MIT)">    </p:cNvPr>
+          <p:cNvPr id="28" name="Image 6" descr="article icon from tabler-icons (MIT)">    </p:cNvPr>
           <p:cNvPicPr>
             <a:picLocks noChangeAspect="1"/>
           </p:cNvPicPr>
@@ -17142,7 +17142,7 @@
       </p:sp>
       <p:pic>
         <p:nvPicPr>
-          <p:cNvPr id="31" name="Image 7" descr="chart icon from tabler-icons (MIT)">    </p:cNvPr>
+          <p:cNvPr id="31" name="Image 7" descr="table icon from tabler-icons (MIT)">    </p:cNvPr>
           <p:cNvPicPr>
             <a:picLocks noChangeAspect="1"/>
           </p:cNvPicPr>

--- a/docs/theme-preview/pptx/magazine.pptx
+++ b/docs/theme-preview/pptx/magazine.pptx
@@ -12478,7 +12478,7 @@
                 <a:ea typeface="Pretendard" pitchFamily="34" charset="-122"/>
                 <a:cs typeface="Pretendard" pitchFamily="34" charset="-120"/>
               </a:rPr>
-              <a:t>목차</a:t>
+              <a:t>Agenda</a:t>
             </a:r>
             <a:endParaRPr lang="en-US" sz="3800" dirty="0"/>
           </a:p>

--- a/docs/theme-preview/pptx/magazine.pptx
+++ b/docs/theme-preview/pptx/magazine.pptx
@@ -3284,36 +3284,75 @@
           </a:ln>
         </p:spPr>
       </p:sp>
-      <p:sp>
-        <p:nvSpPr>
-          <p:cNvPr id="8" name="Shape 6"/>
-          <p:cNvSpPr/>
-          <p:nvPr/>
-        </p:nvSpPr>
-        <p:spPr>
-          <a:xfrm>
-            <a:off x="914400" y="1463040"/>
-            <a:ext cx="10241280" cy="73152"/>
-          </a:xfrm>
-          <a:prstGeom prst="rect">
-            <a:avLst/>
-          </a:prstGeom>
-          <a:solidFill>
-            <a:srgbClr val="C2410C"/>
-          </a:solidFill>
-          <a:ln w="12700">
-            <a:solidFill>
-              <a:srgbClr val="C2410C">
+      <p:pic>
+        <p:nvPicPr>
+          <p:cNvPr id="8" name="Image 0" descr="preencoded.png">    </p:cNvPr>
+          <p:cNvPicPr>
+            <a:picLocks noChangeAspect="1"/>
+          </p:cNvPicPr>
+          <p:nvPr/>
+        </p:nvPicPr>
+        <p:blipFill>
+          <a:blip r:embed="rId1">
+            <a:extLst>
+              <a:ext uri="{96DAC541-7B7A-43D3-8B79-37D633B846F1}">
+                <asvg:svgBlip xmlns:asvg="http://schemas.microsoft.com/office/drawing/2016/SVG/main" r:embed="rId2"/>
+              </a:ext>
+            </a:extLst>
+          </a:blip>
+          <a:stretch>
+            <a:fillRect/>
+          </a:stretch>
+        </p:blipFill>
+        <p:spPr>
+          <a:xfrm>
+            <a:off x="914400" y="1417320"/>
+            <a:ext cx="10241280" cy="4526280"/>
+          </a:xfrm>
+          <a:prstGeom prst="rect">
+            <a:avLst/>
+          </a:prstGeom>
+        </p:spPr>
+      </p:pic>
+      <p:sp>
+        <p:nvSpPr>
+          <p:cNvPr id="9" name="Shape 6"/>
+          <p:cNvSpPr/>
+          <p:nvPr/>
+        </p:nvSpPr>
+        <p:spPr>
+          <a:xfrm>
+            <a:off x="914400" y="1417320"/>
+            <a:ext cx="10241280" cy="4526280"/>
+          </a:xfrm>
+          <a:prstGeom prst="rect">
+            <a:avLst/>
+          </a:prstGeom>
+          <a:solidFill>
+            <a:srgbClr val="FFFCF7">
+              <a:alpha val="0"/>
+            </a:srgbClr>
+          </a:solidFill>
+          <a:ln w="12700">
+            <a:solidFill>
+              <a:srgbClr val="D6D3D1">
                 <a:alpha val="0"/>
               </a:srgbClr>
             </a:solidFill>
             <a:prstDash val="solid"/>
           </a:ln>
-        </p:spPr>
-      </p:sp>
-      <p:sp>
-        <p:nvSpPr>
-          <p:cNvPr id="9" name="Text 7"/>
+          <a:effectLst>
+            <a:outerShdw sx="100000" sy="100000" kx="0" ky="0" algn="bl" rotWithShape="0" blurRad="12700" dist="50800" dir="2700000">
+              <a:srgbClr val="000000">
+                <a:alpha val="8000"/>
+              </a:srgbClr>
+            </a:outerShdw>
+          </a:effectLst>
+        </p:spPr>
+      </p:sp>
+      <p:sp>
+        <p:nvSpPr>
+          <p:cNvPr id="10" name="Text 7"/>
           <p:cNvSpPr txBox="1"/>
           <p:nvPr/>
         </p:nvSpPr>
@@ -3368,8 +3407,8 @@
           </p:nvPr>
         </p:nvGraphicFramePr>
         <p:xfrm>
-          <a:off x="914400" y="1463040"/>
-          <a:ext cx="10241280" cy="4480560"/>
+          <a:off x="914400" y="1417320"/>
+          <a:ext cx="10241280" cy="4526280"/>
         </p:xfrm>
         <a:graphic>
           <a:graphicData uri="http://schemas.openxmlformats.org/drawingml/2006/table">
@@ -3380,7 +3419,7 @@
                 <a:gridCol w="3413760"/>
                 <a:gridCol w="3413760"/>
               </a:tblGrid>
-              <a:tr h="896112">
+              <a:tr h="905256">
                 <a:tc>
                   <a:txBody>
                     <a:bodyPr/>
@@ -3390,7 +3429,7 @@
                         <a:buNone/>
                       </a:pPr>
                       <a:r>
-                        <a:rPr lang="en-US" sz="2200" b="1" dirty="0">
+                        <a:rPr lang="en-US" sz="1800" b="1" dirty="0">
                           <a:solidFill>
                             <a:srgbClr val="FFFFFF"/>
                           </a:solidFill>
@@ -3400,7 +3439,7 @@
                         </a:rPr>
                         <a:t>Object</a:t>
                       </a:r>
-                      <a:endParaRPr lang="en-US" sz="2200" dirty="0">
+                      <a:endParaRPr lang="en-US" sz="1800" dirty="0">
                         <a:latin typeface="Pretendard" charset="0"/>
                         <a:ea typeface="Pretendard" charset="0"/>
                         <a:cs typeface="Pretendard" charset="0"/>
@@ -3458,7 +3497,7 @@
                         <a:buNone/>
                       </a:pPr>
                       <a:r>
-                        <a:rPr lang="en-US" sz="2200" b="1" dirty="0">
+                        <a:rPr lang="en-US" sz="1800" b="1" dirty="0">
                           <a:solidFill>
                             <a:srgbClr val="FFFFFF"/>
                           </a:solidFill>
@@ -3468,7 +3507,7 @@
                         </a:rPr>
                         <a:t>Renderer expectation</a:t>
                       </a:r>
-                      <a:endParaRPr lang="en-US" sz="2200" dirty="0">
+                      <a:endParaRPr lang="en-US" sz="1800" dirty="0">
                         <a:latin typeface="Pretendard" charset="0"/>
                         <a:ea typeface="Pretendard" charset="0"/>
                         <a:cs typeface="Pretendard" charset="0"/>
@@ -3526,7 +3565,7 @@
                         <a:buNone/>
                       </a:pPr>
                       <a:r>
-                        <a:rPr lang="en-US" sz="2200" b="1" dirty="0">
+                        <a:rPr lang="en-US" sz="1800" b="1" dirty="0">
                           <a:solidFill>
                             <a:srgbClr val="FFFFFF"/>
                           </a:solidFill>
@@ -3536,7 +3575,7 @@
                         </a:rPr>
                         <a:t>QA signal</a:t>
                       </a:r>
-                      <a:endParaRPr lang="en-US" sz="2200" dirty="0">
+                      <a:endParaRPr lang="en-US" sz="1800" dirty="0">
                         <a:latin typeface="Pretendard" charset="0"/>
                         <a:ea typeface="Pretendard" charset="0"/>
                         <a:cs typeface="Pretendard" charset="0"/>
@@ -3586,7 +3625,7 @@
                   </a:tcPr>
                 </a:tc>
               </a:tr>
-              <a:tr h="896112">
+              <a:tr h="905256">
                 <a:tc>
                   <a:txBody>
                     <a:bodyPr/>
@@ -3596,7 +3635,7 @@
                         <a:buNone/>
                       </a:pPr>
                       <a:r>
-                        <a:rPr lang="en-US" sz="2200" b="1" dirty="0">
+                        <a:rPr lang="en-US" sz="1800" b="1" dirty="0">
                           <a:solidFill>
                             <a:srgbClr val="18181B"/>
                           </a:solidFill>
@@ -3606,7 +3645,7 @@
                         </a:rPr>
                         <a:t>Text box</a:t>
                       </a:r>
-                      <a:endParaRPr lang="en-US" sz="2200" dirty="0">
+                      <a:endParaRPr lang="en-US" sz="1800" dirty="0">
                         <a:latin typeface="Pretendard" charset="0"/>
                         <a:ea typeface="Pretendard" charset="0"/>
                         <a:cs typeface="Pretendard" charset="0"/>
@@ -3661,7 +3700,7 @@
                         <a:buNone/>
                       </a:pPr>
                       <a:r>
-                        <a:rPr lang="en-US" sz="2200" dirty="0">
+                        <a:rPr lang="en-US" sz="1800" dirty="0">
                           <a:solidFill>
                             <a:srgbClr val="18181B"/>
                           </a:solidFill>
@@ -3671,7 +3710,7 @@
                         </a:rPr>
                         <a:t>editable, middle aligned</a:t>
                       </a:r>
-                      <a:endParaRPr lang="en-US" sz="2200" dirty="0">
+                      <a:endParaRPr lang="en-US" sz="1800" dirty="0">
                         <a:latin typeface="Pretendard" charset="0"/>
                         <a:ea typeface="Pretendard" charset="0"/>
                         <a:cs typeface="Pretendard" charset="0"/>
@@ -3726,7 +3765,7 @@
                         <a:buNone/>
                       </a:pPr>
                       <a:r>
-                        <a:rPr lang="en-US" sz="2200" dirty="0">
+                        <a:rPr lang="en-US" sz="1800" dirty="0">
                           <a:solidFill>
                             <a:srgbClr val="18181B"/>
                           </a:solidFill>
@@ -3736,7 +3775,7 @@
                         </a:rPr>
                         <a:t>readable minimum size</a:t>
                       </a:r>
-                      <a:endParaRPr lang="en-US" sz="2200" dirty="0">
+                      <a:endParaRPr lang="en-US" sz="1800" dirty="0">
                         <a:latin typeface="Pretendard" charset="0"/>
                         <a:ea typeface="Pretendard" charset="0"/>
                         <a:cs typeface="Pretendard" charset="0"/>
@@ -3783,7 +3822,7 @@
                   </a:tcPr>
                 </a:tc>
               </a:tr>
-              <a:tr h="896112">
+              <a:tr h="905256">
                 <a:tc>
                   <a:txBody>
                     <a:bodyPr/>
@@ -3793,7 +3832,7 @@
                         <a:buNone/>
                       </a:pPr>
                       <a:r>
-                        <a:rPr lang="en-US" sz="2200" b="1" dirty="0">
+                        <a:rPr lang="en-US" sz="1800" b="1" dirty="0">
                           <a:solidFill>
                             <a:srgbClr val="18181B"/>
                           </a:solidFill>
@@ -3803,7 +3842,7 @@
                         </a:rPr>
                         <a:t>Table</a:t>
                       </a:r>
-                      <a:endParaRPr lang="en-US" sz="2200" dirty="0">
+                      <a:endParaRPr lang="en-US" sz="1800" dirty="0">
                         <a:latin typeface="Pretendard" charset="0"/>
                         <a:ea typeface="Pretendard" charset="0"/>
                         <a:cs typeface="Pretendard" charset="0"/>
@@ -3863,7 +3902,7 @@
                         <a:buNone/>
                       </a:pPr>
                       <a:r>
-                        <a:rPr lang="en-US" sz="2200" dirty="0">
+                        <a:rPr lang="en-US" sz="1800" dirty="0">
                           <a:solidFill>
                             <a:srgbClr val="18181B"/>
                           </a:solidFill>
@@ -3873,7 +3912,7 @@
                         </a:rPr>
                         <a:t>native table object</a:t>
                       </a:r>
-                      <a:endParaRPr lang="en-US" sz="2200" dirty="0">
+                      <a:endParaRPr lang="en-US" sz="1800" dirty="0">
                         <a:latin typeface="Pretendard" charset="0"/>
                         <a:ea typeface="Pretendard" charset="0"/>
                         <a:cs typeface="Pretendard" charset="0"/>
@@ -3933,7 +3972,7 @@
                         <a:buNone/>
                       </a:pPr>
                       <a:r>
-                        <a:rPr lang="en-US" sz="2200" dirty="0">
+                        <a:rPr lang="en-US" sz="1800" dirty="0">
                           <a:solidFill>
                             <a:srgbClr val="18181B"/>
                           </a:solidFill>
@@ -3943,7 +3982,7 @@
                         </a:rPr>
                         <a:t>header fill and cell padding</a:t>
                       </a:r>
-                      <a:endParaRPr lang="en-US" sz="2200" dirty="0">
+                      <a:endParaRPr lang="en-US" sz="1800" dirty="0">
                         <a:latin typeface="Pretendard" charset="0"/>
                         <a:ea typeface="Pretendard" charset="0"/>
                         <a:cs typeface="Pretendard" charset="0"/>
@@ -3995,7 +4034,7 @@
                   </a:tcPr>
                 </a:tc>
               </a:tr>
-              <a:tr h="896112">
+              <a:tr h="905256">
                 <a:tc>
                   <a:txBody>
                     <a:bodyPr/>
@@ -4005,7 +4044,7 @@
                         <a:buNone/>
                       </a:pPr>
                       <a:r>
-                        <a:rPr lang="en-US" sz="2200" b="1" dirty="0">
+                        <a:rPr lang="en-US" sz="1800" b="1" dirty="0">
                           <a:solidFill>
                             <a:srgbClr val="18181B"/>
                           </a:solidFill>
@@ -4015,7 +4054,7 @@
                         </a:rPr>
                         <a:t>Diagram</a:t>
                       </a:r>
-                      <a:endParaRPr lang="en-US" sz="2200" dirty="0">
+                      <a:endParaRPr lang="en-US" sz="1800" dirty="0">
                         <a:latin typeface="Pretendard" charset="0"/>
                         <a:ea typeface="Pretendard" charset="0"/>
                         <a:cs typeface="Pretendard" charset="0"/>
@@ -4070,7 +4109,7 @@
                         <a:buNone/>
                       </a:pPr>
                       <a:r>
-                        <a:rPr lang="en-US" sz="2200" dirty="0">
+                        <a:rPr lang="en-US" sz="1800" dirty="0">
                           <a:solidFill>
                             <a:srgbClr val="18181B"/>
                           </a:solidFill>
@@ -4080,7 +4119,7 @@
                         </a:rPr>
                         <a:t>nodes and connectors</a:t>
                       </a:r>
-                      <a:endParaRPr lang="en-US" sz="2200" dirty="0">
+                      <a:endParaRPr lang="en-US" sz="1800" dirty="0">
                         <a:latin typeface="Pretendard" charset="0"/>
                         <a:ea typeface="Pretendard" charset="0"/>
                         <a:cs typeface="Pretendard" charset="0"/>
@@ -4135,7 +4174,7 @@
                         <a:buNone/>
                       </a:pPr>
                       <a:r>
-                        <a:rPr lang="en-US" sz="2200" dirty="0">
+                        <a:rPr lang="en-US" sz="1800" dirty="0">
                           <a:solidFill>
                             <a:srgbClr val="18181B"/>
                           </a:solidFill>
@@ -4145,7 +4184,7 @@
                         </a:rPr>
                         <a:t>no clipped labels</a:t>
                       </a:r>
-                      <a:endParaRPr lang="en-US" sz="2200" dirty="0">
+                      <a:endParaRPr lang="en-US" sz="1800" dirty="0">
                         <a:latin typeface="Pretendard" charset="0"/>
                         <a:ea typeface="Pretendard" charset="0"/>
                         <a:cs typeface="Pretendard" charset="0"/>
@@ -4192,7 +4231,7 @@
                   </a:tcPr>
                 </a:tc>
               </a:tr>
-              <a:tr h="896112">
+              <a:tr h="905256">
                 <a:tc>
                   <a:txBody>
                     <a:bodyPr/>
@@ -4202,7 +4241,7 @@
                         <a:buNone/>
                       </a:pPr>
                       <a:r>
-                        <a:rPr lang="en-US" sz="2200" b="1" dirty="0">
+                        <a:rPr lang="en-US" sz="1800" b="1" dirty="0">
                           <a:solidFill>
                             <a:srgbClr val="18181B"/>
                           </a:solidFill>
@@ -4212,7 +4251,7 @@
                         </a:rPr>
                         <a:t>Chart</a:t>
                       </a:r>
-                      <a:endParaRPr lang="en-US" sz="2200" dirty="0">
+                      <a:endParaRPr lang="en-US" sz="1800" dirty="0">
                         <a:latin typeface="Pretendard" charset="0"/>
                         <a:ea typeface="Pretendard" charset="0"/>
                         <a:cs typeface="Pretendard" charset="0"/>
@@ -4272,7 +4311,7 @@
                         <a:buNone/>
                       </a:pPr>
                       <a:r>
-                        <a:rPr lang="en-US" sz="2200" dirty="0">
+                        <a:rPr lang="en-US" sz="1800" dirty="0">
                           <a:solidFill>
                             <a:srgbClr val="18181B"/>
                           </a:solidFill>
@@ -4282,7 +4321,7 @@
                         </a:rPr>
                         <a:t>theme-colored data object</a:t>
                       </a:r>
-                      <a:endParaRPr lang="en-US" sz="2200" dirty="0">
+                      <a:endParaRPr lang="en-US" sz="1800" dirty="0">
                         <a:latin typeface="Pretendard" charset="0"/>
                         <a:ea typeface="Pretendard" charset="0"/>
                         <a:cs typeface="Pretendard" charset="0"/>
@@ -4342,7 +4381,7 @@
                         <a:buNone/>
                       </a:pPr>
                       <a:r>
-                        <a:rPr lang="en-US" sz="2200" dirty="0">
+                        <a:rPr lang="en-US" sz="1800" dirty="0">
                           <a:solidFill>
                             <a:srgbClr val="18181B"/>
                           </a:solidFill>
@@ -4352,7 +4391,7 @@
                         </a:rPr>
                         <a:t>contrast and value clarity</a:t>
                       </a:r>
-                      <a:endParaRPr lang="en-US" sz="2200" dirty="0">
+                      <a:endParaRPr lang="en-US" sz="1800" dirty="0">
                         <a:latin typeface="Pretendard" charset="0"/>
                         <a:ea typeface="Pretendard" charset="0"/>
                         <a:cs typeface="Pretendard" charset="0"/>
@@ -5096,36 +5135,75 @@
           </a:ln>
         </p:spPr>
       </p:sp>
-      <p:sp>
-        <p:nvSpPr>
-          <p:cNvPr id="8" name="Shape 6"/>
-          <p:cNvSpPr/>
-          <p:nvPr/>
-        </p:nvSpPr>
-        <p:spPr>
-          <a:xfrm>
-            <a:off x="914400" y="1463040"/>
-            <a:ext cx="10241280" cy="73152"/>
-          </a:xfrm>
-          <a:prstGeom prst="rect">
-            <a:avLst/>
-          </a:prstGeom>
-          <a:solidFill>
-            <a:srgbClr val="C2410C"/>
-          </a:solidFill>
-          <a:ln w="12700">
-            <a:solidFill>
-              <a:srgbClr val="C2410C">
+      <p:pic>
+        <p:nvPicPr>
+          <p:cNvPr id="8" name="Image 0" descr="preencoded.png">    </p:cNvPr>
+          <p:cNvPicPr>
+            <a:picLocks noChangeAspect="1"/>
+          </p:cNvPicPr>
+          <p:nvPr/>
+        </p:nvPicPr>
+        <p:blipFill>
+          <a:blip r:embed="rId1">
+            <a:extLst>
+              <a:ext uri="{96DAC541-7B7A-43D3-8B79-37D633B846F1}">
+                <asvg:svgBlip xmlns:asvg="http://schemas.microsoft.com/office/drawing/2016/SVG/main" r:embed="rId2"/>
+              </a:ext>
+            </a:extLst>
+          </a:blip>
+          <a:stretch>
+            <a:fillRect/>
+          </a:stretch>
+        </p:blipFill>
+        <p:spPr>
+          <a:xfrm>
+            <a:off x="914400" y="1417320"/>
+            <a:ext cx="10241280" cy="4526280"/>
+          </a:xfrm>
+          <a:prstGeom prst="rect">
+            <a:avLst/>
+          </a:prstGeom>
+        </p:spPr>
+      </p:pic>
+      <p:sp>
+        <p:nvSpPr>
+          <p:cNvPr id="9" name="Shape 6"/>
+          <p:cNvSpPr/>
+          <p:nvPr/>
+        </p:nvSpPr>
+        <p:spPr>
+          <a:xfrm>
+            <a:off x="914400" y="1417320"/>
+            <a:ext cx="10241280" cy="4526280"/>
+          </a:xfrm>
+          <a:prstGeom prst="rect">
+            <a:avLst/>
+          </a:prstGeom>
+          <a:solidFill>
+            <a:srgbClr val="FFFCF7">
+              <a:alpha val="0"/>
+            </a:srgbClr>
+          </a:solidFill>
+          <a:ln w="12700">
+            <a:solidFill>
+              <a:srgbClr val="D6D3D1">
                 <a:alpha val="0"/>
               </a:srgbClr>
             </a:solidFill>
             <a:prstDash val="solid"/>
           </a:ln>
-        </p:spPr>
-      </p:sp>
-      <p:sp>
-        <p:nvSpPr>
-          <p:cNvPr id="9" name="Text 7"/>
+          <a:effectLst>
+            <a:outerShdw sx="100000" sy="100000" kx="0" ky="0" algn="bl" rotWithShape="0" blurRad="12700" dist="50800" dir="2700000">
+              <a:srgbClr val="000000">
+                <a:alpha val="8000"/>
+              </a:srgbClr>
+            </a:outerShdw>
+          </a:effectLst>
+        </p:spPr>
+      </p:sp>
+      <p:sp>
+        <p:nvSpPr>
+          <p:cNvPr id="10" name="Text 7"/>
           <p:cNvSpPr txBox="1"/>
           <p:nvPr/>
         </p:nvSpPr>
@@ -5180,8 +5258,8 @@
           </p:nvPr>
         </p:nvGraphicFramePr>
         <p:xfrm>
-          <a:off x="914400" y="1463040"/>
-          <a:ext cx="10241280" cy="4480560"/>
+          <a:off x="914400" y="1417320"/>
+          <a:ext cx="10241280" cy="4526280"/>
         </p:xfrm>
         <a:graphic>
           <a:graphicData uri="http://schemas.openxmlformats.org/drawingml/2006/table">
@@ -5192,7 +5270,7 @@
                 <a:gridCol w="3413760"/>
                 <a:gridCol w="3413760"/>
               </a:tblGrid>
-              <a:tr h="1120140">
+              <a:tr h="1131570">
                 <a:tc>
                   <a:txBody>
                     <a:bodyPr/>
@@ -5202,7 +5280,7 @@
                         <a:buNone/>
                       </a:pPr>
                       <a:r>
-                        <a:rPr lang="en-US" sz="2200" b="1" dirty="0">
+                        <a:rPr lang="en-US" sz="1800" b="1" dirty="0">
                           <a:solidFill>
                             <a:srgbClr val="FFFFFF"/>
                           </a:solidFill>
@@ -5212,7 +5290,7 @@
                         </a:rPr>
                         <a:t>Stage</a:t>
                       </a:r>
-                      <a:endParaRPr lang="en-US" sz="2200" dirty="0">
+                      <a:endParaRPr lang="en-US" sz="1800" dirty="0">
                         <a:latin typeface="Pretendard" charset="0"/>
                         <a:ea typeface="Pretendard" charset="0"/>
                         <a:cs typeface="Pretendard" charset="0"/>
@@ -5270,7 +5348,7 @@
                         <a:buNone/>
                       </a:pPr>
                       <a:r>
-                        <a:rPr lang="en-US" sz="2200" b="1" dirty="0">
+                        <a:rPr lang="en-US" sz="1800" b="1" dirty="0">
                           <a:solidFill>
                             <a:srgbClr val="FFFFFF"/>
                           </a:solidFill>
@@ -5280,7 +5358,7 @@
                         </a:rPr>
                         <a:t>Coverage</a:t>
                       </a:r>
-                      <a:endParaRPr lang="en-US" sz="2200" dirty="0">
+                      <a:endParaRPr lang="en-US" sz="1800" dirty="0">
                         <a:latin typeface="Pretendard" charset="0"/>
                         <a:ea typeface="Pretendard" charset="0"/>
                         <a:cs typeface="Pretendard" charset="0"/>
@@ -5338,7 +5416,7 @@
                         <a:buNone/>
                       </a:pPr>
                       <a:r>
-                        <a:rPr lang="en-US" sz="2200" b="1" dirty="0">
+                        <a:rPr lang="en-US" sz="1800" b="1" dirty="0">
                           <a:solidFill>
                             <a:srgbClr val="FFFFFF"/>
                           </a:solidFill>
@@ -5348,7 +5426,7 @@
                         </a:rPr>
                         <a:t>Defects</a:t>
                       </a:r>
-                      <a:endParaRPr lang="en-US" sz="2200" dirty="0">
+                      <a:endParaRPr lang="en-US" sz="1800" dirty="0">
                         <a:latin typeface="Pretendard" charset="0"/>
                         <a:ea typeface="Pretendard" charset="0"/>
                         <a:cs typeface="Pretendard" charset="0"/>
@@ -5398,7 +5476,7 @@
                   </a:tcPr>
                 </a:tc>
               </a:tr>
-              <a:tr h="1120140">
+              <a:tr h="1131570">
                 <a:tc>
                   <a:txBody>
                     <a:bodyPr/>
@@ -5408,7 +5486,7 @@
                         <a:buNone/>
                       </a:pPr>
                       <a:r>
-                        <a:rPr lang="en-US" sz="2200" b="1" dirty="0">
+                        <a:rPr lang="en-US" sz="1800" b="1" dirty="0">
                           <a:solidFill>
                             <a:srgbClr val="18181B"/>
                           </a:solidFill>
@@ -5418,7 +5496,7 @@
                         </a:rPr>
                         <a:t>Parser</a:t>
                       </a:r>
-                      <a:endParaRPr lang="en-US" sz="2200" dirty="0">
+                      <a:endParaRPr lang="en-US" sz="1800" dirty="0">
                         <a:latin typeface="Pretendard" charset="0"/>
                         <a:ea typeface="Pretendard" charset="0"/>
                         <a:cs typeface="Pretendard" charset="0"/>
@@ -5473,7 +5551,7 @@
                         <a:buNone/>
                       </a:pPr>
                       <a:r>
-                        <a:rPr lang="en-US" sz="2200" dirty="0">
+                        <a:rPr lang="en-US" sz="1800" dirty="0">
                           <a:solidFill>
                             <a:srgbClr val="18181B"/>
                           </a:solidFill>
@@ -5483,7 +5561,7 @@
                         </a:rPr>
                         <a:t>92</a:t>
                       </a:r>
-                      <a:endParaRPr lang="en-US" sz="2200" dirty="0">
+                      <a:endParaRPr lang="en-US" sz="1800" dirty="0">
                         <a:latin typeface="Pretendard" charset="0"/>
                         <a:ea typeface="Pretendard" charset="0"/>
                         <a:cs typeface="Pretendard" charset="0"/>
@@ -5538,7 +5616,7 @@
                         <a:buNone/>
                       </a:pPr>
                       <a:r>
-                        <a:rPr lang="en-US" sz="2200" dirty="0">
+                        <a:rPr lang="en-US" sz="1800" dirty="0">
                           <a:solidFill>
                             <a:srgbClr val="18181B"/>
                           </a:solidFill>
@@ -5548,7 +5626,7 @@
                         </a:rPr>
                         <a:t>3</a:t>
                       </a:r>
-                      <a:endParaRPr lang="en-US" sz="2200" dirty="0">
+                      <a:endParaRPr lang="en-US" sz="1800" dirty="0">
                         <a:latin typeface="Pretendard" charset="0"/>
                         <a:ea typeface="Pretendard" charset="0"/>
                         <a:cs typeface="Pretendard" charset="0"/>
@@ -5595,7 +5673,7 @@
                   </a:tcPr>
                 </a:tc>
               </a:tr>
-              <a:tr h="1120140">
+              <a:tr h="1131570">
                 <a:tc>
                   <a:txBody>
                     <a:bodyPr/>
@@ -5605,7 +5683,7 @@
                         <a:buNone/>
                       </a:pPr>
                       <a:r>
-                        <a:rPr lang="en-US" sz="2200" b="1" dirty="0">
+                        <a:rPr lang="en-US" sz="1800" b="1" dirty="0">
                           <a:solidFill>
                             <a:srgbClr val="18181B"/>
                           </a:solidFill>
@@ -5615,7 +5693,7 @@
                         </a:rPr>
                         <a:t>Layout</a:t>
                       </a:r>
-                      <a:endParaRPr lang="en-US" sz="2200" dirty="0">
+                      <a:endParaRPr lang="en-US" sz="1800" dirty="0">
                         <a:latin typeface="Pretendard" charset="0"/>
                         <a:ea typeface="Pretendard" charset="0"/>
                         <a:cs typeface="Pretendard" charset="0"/>
@@ -5675,7 +5753,7 @@
                         <a:buNone/>
                       </a:pPr>
                       <a:r>
-                        <a:rPr lang="en-US" sz="2200" dirty="0">
+                        <a:rPr lang="en-US" sz="1800" dirty="0">
                           <a:solidFill>
                             <a:srgbClr val="18181B"/>
                           </a:solidFill>
@@ -5685,7 +5763,7 @@
                         </a:rPr>
                         <a:t>88</a:t>
                       </a:r>
-                      <a:endParaRPr lang="en-US" sz="2200" dirty="0">
+                      <a:endParaRPr lang="en-US" sz="1800" dirty="0">
                         <a:latin typeface="Pretendard" charset="0"/>
                         <a:ea typeface="Pretendard" charset="0"/>
                         <a:cs typeface="Pretendard" charset="0"/>
@@ -5745,7 +5823,7 @@
                         <a:buNone/>
                       </a:pPr>
                       <a:r>
-                        <a:rPr lang="en-US" sz="2200" dirty="0">
+                        <a:rPr lang="en-US" sz="1800" dirty="0">
                           <a:solidFill>
                             <a:srgbClr val="18181B"/>
                           </a:solidFill>
@@ -5755,7 +5833,7 @@
                         </a:rPr>
                         <a:t>5</a:t>
                       </a:r>
-                      <a:endParaRPr lang="en-US" sz="2200" dirty="0">
+                      <a:endParaRPr lang="en-US" sz="1800" dirty="0">
                         <a:latin typeface="Pretendard" charset="0"/>
                         <a:ea typeface="Pretendard" charset="0"/>
                         <a:cs typeface="Pretendard" charset="0"/>
@@ -5807,7 +5885,7 @@
                   </a:tcPr>
                 </a:tc>
               </a:tr>
-              <a:tr h="1120140">
+              <a:tr h="1131570">
                 <a:tc>
                   <a:txBody>
                     <a:bodyPr/>
@@ -5817,7 +5895,7 @@
                         <a:buNone/>
                       </a:pPr>
                       <a:r>
-                        <a:rPr lang="en-US" sz="2200" b="1" dirty="0">
+                        <a:rPr lang="en-US" sz="1800" b="1" dirty="0">
                           <a:solidFill>
                             <a:srgbClr val="18181B"/>
                           </a:solidFill>
@@ -5827,7 +5905,7 @@
                         </a:rPr>
                         <a:t>PPTX</a:t>
                       </a:r>
-                      <a:endParaRPr lang="en-US" sz="2200" dirty="0">
+                      <a:endParaRPr lang="en-US" sz="1800" dirty="0">
                         <a:latin typeface="Pretendard" charset="0"/>
                         <a:ea typeface="Pretendard" charset="0"/>
                         <a:cs typeface="Pretendard" charset="0"/>
@@ -5882,7 +5960,7 @@
                         <a:buNone/>
                       </a:pPr>
                       <a:r>
-                        <a:rPr lang="en-US" sz="2200" dirty="0">
+                        <a:rPr lang="en-US" sz="1800" dirty="0">
                           <a:solidFill>
                             <a:srgbClr val="18181B"/>
                           </a:solidFill>
@@ -5892,7 +5970,7 @@
                         </a:rPr>
                         <a:t>95</a:t>
                       </a:r>
-                      <a:endParaRPr lang="en-US" sz="2200" dirty="0">
+                      <a:endParaRPr lang="en-US" sz="1800" dirty="0">
                         <a:latin typeface="Pretendard" charset="0"/>
                         <a:ea typeface="Pretendard" charset="0"/>
                         <a:cs typeface="Pretendard" charset="0"/>
@@ -5947,7 +6025,7 @@
                         <a:buNone/>
                       </a:pPr>
                       <a:r>
-                        <a:rPr lang="en-US" sz="2200" dirty="0">
+                        <a:rPr lang="en-US" sz="1800" dirty="0">
                           <a:solidFill>
                             <a:srgbClr val="18181B"/>
                           </a:solidFill>
@@ -5957,7 +6035,7 @@
                         </a:rPr>
                         <a:t>2</a:t>
                       </a:r>
-                      <a:endParaRPr lang="en-US" sz="2200" dirty="0">
+                      <a:endParaRPr lang="en-US" sz="1800" dirty="0">
                         <a:latin typeface="Pretendard" charset="0"/>
                         <a:ea typeface="Pretendard" charset="0"/>
                         <a:cs typeface="Pretendard" charset="0"/>
